--- a/cours/Module TIC/Série Officielle 01-10/Cours_TIC_06_Microsoft_PowerPoint_EN.pptx
+++ b/cours/Module TIC/Série Officielle 01-10/Cours_TIC_06_Microsoft_PowerPoint_EN.pptx
@@ -2856,7 +2856,7 @@
           <a:solidFill>
             <a:schemeClr val="tx1"/>
           </a:solidFill>
-          <a:latin typeface="+mj-lt"/>
+          <a:latin typeface="Poppins"/>
           <a:ea typeface="+mj-ea"/>
           <a:cs typeface="+mj-cs"/>
         </a:defRPr>
@@ -2873,7 +2873,7 @@
           <a:solidFill>
             <a:schemeClr val="tx1"/>
           </a:solidFill>
-          <a:latin typeface="+mn-lt"/>
+          <a:latin typeface="Poppins"/>
           <a:ea typeface="+mn-ea"/>
           <a:cs typeface="+mn-cs"/>
         </a:defRPr>
@@ -2888,7 +2888,7 @@
           <a:solidFill>
             <a:schemeClr val="tx1"/>
           </a:solidFill>
-          <a:latin typeface="+mn-lt"/>
+          <a:latin typeface="Poppins"/>
           <a:ea typeface="+mn-ea"/>
           <a:cs typeface="+mn-cs"/>
         </a:defRPr>
@@ -2903,7 +2903,7 @@
           <a:solidFill>
             <a:schemeClr val="tx1"/>
           </a:solidFill>
-          <a:latin typeface="+mn-lt"/>
+          <a:latin typeface="Poppins"/>
           <a:ea typeface="+mn-ea"/>
           <a:cs typeface="+mn-cs"/>
         </a:defRPr>
@@ -2918,7 +2918,7 @@
           <a:solidFill>
             <a:schemeClr val="tx1"/>
           </a:solidFill>
-          <a:latin typeface="+mn-lt"/>
+          <a:latin typeface="Poppins"/>
           <a:ea typeface="+mn-ea"/>
           <a:cs typeface="+mn-cs"/>
         </a:defRPr>
@@ -2933,7 +2933,7 @@
           <a:solidFill>
             <a:schemeClr val="tx1"/>
           </a:solidFill>
-          <a:latin typeface="+mn-lt"/>
+          <a:latin typeface="Poppins"/>
           <a:ea typeface="+mn-ea"/>
           <a:cs typeface="+mn-cs"/>
         </a:defRPr>
@@ -2948,7 +2948,7 @@
           <a:solidFill>
             <a:schemeClr val="tx1"/>
           </a:solidFill>
-          <a:latin typeface="+mn-lt"/>
+          <a:latin typeface="Poppins"/>
           <a:ea typeface="+mn-ea"/>
           <a:cs typeface="+mn-cs"/>
         </a:defRPr>
@@ -2963,7 +2963,7 @@
           <a:solidFill>
             <a:schemeClr val="tx1"/>
           </a:solidFill>
-          <a:latin typeface="+mn-lt"/>
+          <a:latin typeface="Poppins"/>
           <a:ea typeface="+mn-ea"/>
           <a:cs typeface="+mn-cs"/>
         </a:defRPr>
@@ -2978,7 +2978,7 @@
           <a:solidFill>
             <a:schemeClr val="tx1"/>
           </a:solidFill>
-          <a:latin typeface="+mn-lt"/>
+          <a:latin typeface="Poppins"/>
           <a:ea typeface="+mn-ea"/>
           <a:cs typeface="+mn-cs"/>
         </a:defRPr>
@@ -2993,7 +2993,7 @@
           <a:solidFill>
             <a:schemeClr val="tx1"/>
           </a:solidFill>
-          <a:latin typeface="+mn-lt"/>
+          <a:latin typeface="Poppins"/>
           <a:ea typeface="+mn-ea"/>
           <a:cs typeface="+mn-cs"/>
         </a:defRPr>
@@ -3008,7 +3008,7 @@
           <a:solidFill>
             <a:schemeClr val="tx1"/>
           </a:solidFill>
-          <a:latin typeface="+mn-lt"/>
+          <a:latin typeface="Poppins"/>
           <a:ea typeface="+mn-ea"/>
           <a:cs typeface="+mn-cs"/>
         </a:defRPr>
@@ -3018,7 +3018,7 @@
           <a:solidFill>
             <a:schemeClr val="tx1"/>
           </a:solidFill>
-          <a:latin typeface="+mn-lt"/>
+          <a:latin typeface="Poppins"/>
           <a:ea typeface="+mn-ea"/>
           <a:cs typeface="+mn-cs"/>
         </a:defRPr>
@@ -3028,7 +3028,7 @@
           <a:solidFill>
             <a:schemeClr val="tx1"/>
           </a:solidFill>
-          <a:latin typeface="+mn-lt"/>
+          <a:latin typeface="Poppins"/>
           <a:ea typeface="+mn-ea"/>
           <a:cs typeface="+mn-cs"/>
         </a:defRPr>
@@ -3038,7 +3038,7 @@
           <a:solidFill>
             <a:schemeClr val="tx1"/>
           </a:solidFill>
-          <a:latin typeface="+mn-lt"/>
+          <a:latin typeface="Poppins"/>
           <a:ea typeface="+mn-ea"/>
           <a:cs typeface="+mn-cs"/>
         </a:defRPr>
@@ -3048,7 +3048,7 @@
           <a:solidFill>
             <a:schemeClr val="tx1"/>
           </a:solidFill>
-          <a:latin typeface="+mn-lt"/>
+          <a:latin typeface="Poppins"/>
           <a:ea typeface="+mn-ea"/>
           <a:cs typeface="+mn-cs"/>
         </a:defRPr>
@@ -3058,7 +3058,7 @@
           <a:solidFill>
             <a:schemeClr val="tx1"/>
           </a:solidFill>
-          <a:latin typeface="+mn-lt"/>
+          <a:latin typeface="Poppins"/>
           <a:ea typeface="+mn-ea"/>
           <a:cs typeface="+mn-cs"/>
         </a:defRPr>
@@ -3068,7 +3068,7 @@
           <a:solidFill>
             <a:schemeClr val="tx1"/>
           </a:solidFill>
-          <a:latin typeface="+mn-lt"/>
+          <a:latin typeface="Poppins"/>
           <a:ea typeface="+mn-ea"/>
           <a:cs typeface="+mn-cs"/>
         </a:defRPr>
@@ -3078,7 +3078,7 @@
           <a:solidFill>
             <a:schemeClr val="tx1"/>
           </a:solidFill>
-          <a:latin typeface="+mn-lt"/>
+          <a:latin typeface="Poppins"/>
           <a:ea typeface="+mn-ea"/>
           <a:cs typeface="+mn-cs"/>
         </a:defRPr>
@@ -3088,7 +3088,7 @@
           <a:solidFill>
             <a:schemeClr val="tx1"/>
           </a:solidFill>
-          <a:latin typeface="+mn-lt"/>
+          <a:latin typeface="Poppins"/>
           <a:ea typeface="+mn-ea"/>
           <a:cs typeface="+mn-cs"/>
         </a:defRPr>
@@ -3103,9 +3103,7 @@
   <p:cSld>
     <p:bg>
       <p:bgPr>
-        <a:solidFill>
-          <a:srgbClr val="0B3D2E"/>
-        </a:solidFill>
+        <a:solidFill>val="004A38"/&gt;</a:solidFill>
         <a:effectLst/>
       </p:bgPr>
     </p:bg>
@@ -3130,9 +3128,7 @@
           <a:prstGeom prst="rect">
             <a:avLst/>
           </a:prstGeom>
-          <a:solidFill>
-            <a:srgbClr val="146B4A"/>
-          </a:solidFill>
+          <a:solidFill>val="007A55"/&gt;</a:solidFill>
           <a:ln>
             <a:noFill/>
           </a:ln>
@@ -3174,9 +3170,7 @@
           <a:prstGeom prst="rect">
             <a:avLst/>
           </a:prstGeom>
-          <a:solidFill>
-            <a:srgbClr val="FFD700"/>
-          </a:solidFill>
+          <a:solidFill>val="F0B429"/&gt;</a:solidFill>
           <a:ln>
             <a:noFill/>
           </a:ln>
@@ -3218,9 +3212,7 @@
           <a:prstGeom prst="rect">
             <a:avLst/>
           </a:prstGeom>
-          <a:solidFill>
-            <a:srgbClr val="FFD700"/>
-          </a:solidFill>
+          <a:solidFill>val="F0B429"/&gt;</a:solidFill>
           <a:ln>
             <a:noFill/>
           </a:ln>
@@ -3262,9 +3254,7 @@
           <a:prstGeom prst="rect">
             <a:avLst/>
           </a:prstGeom>
-          <a:solidFill>
-            <a:srgbClr val="146B4A"/>
-          </a:solidFill>
+          <a:solidFill>val="007A55"/&gt;</a:solidFill>
           <a:ln>
             <a:noFill/>
           </a:ln>
@@ -3306,9 +3296,7 @@
           <a:prstGeom prst="rect">
             <a:avLst/>
           </a:prstGeom>
-          <a:solidFill>
-            <a:srgbClr val="FFD700"/>
-          </a:solidFill>
+          <a:solidFill>val="F0B429"/&gt;</a:solidFill>
           <a:ln>
             <a:noFill/>
           </a:ln>
@@ -3361,10 +3349,8 @@
             <a:pPr algn="ctr"/>
             <a:r>
               <a:rPr sz="4000" b="1" i="0">
-                <a:solidFill>
-                  <a:srgbClr val="FFD700"/>
-                </a:solidFill>
-                <a:latin typeface="Calibri"/>
+                <a:solidFill>val="F0B429"/&gt;</a:solidFill>
+                <a:latin typeface="Poppins"/>
               </a:rPr>
               <a:t>TIC COURSE 06</a:t>
             </a:r>
@@ -3396,10 +3382,8 @@
             <a:pPr algn="ctr"/>
             <a:r>
               <a:rPr sz="3000" b="1" i="0">
-                <a:solidFill>
-                  <a:srgbClr val="FFFFFF"/>
-                </a:solidFill>
-                <a:latin typeface="Calibri"/>
+                <a:solidFill>val="FFFFFF"/&gt;</a:solidFill>
+                <a:latin typeface="Poppins"/>
               </a:rPr>
               <a:t>Presentations: Microsoft PowerPoint</a:t>
             </a:r>
@@ -3420,9 +3404,7 @@
           <a:prstGeom prst="rect">
             <a:avLst/>
           </a:prstGeom>
-          <a:solidFill>
-            <a:srgbClr val="146B4A"/>
-          </a:solidFill>
+          <a:solidFill>val="007A55"/&gt;</a:solidFill>
           <a:ln>
             <a:noFill/>
           </a:ln>
@@ -3475,10 +3457,8 @@
             <a:pPr algn="ctr"/>
             <a:r>
               <a:rPr sz="1800" b="0" i="0">
-                <a:solidFill>
-                  <a:srgbClr val="BBBBBB"/>
-                </a:solidFill>
-                <a:latin typeface="Calibri"/>
+                <a:solidFill>val="9AA7B6"/&gt;</a:solidFill>
+                <a:latin typeface="Poppins"/>
               </a:rPr>
               <a:t>Dr. BELACEL Madani</a:t>
             </a:r>
@@ -3510,10 +3490,8 @@
             <a:pPr algn="ctr"/>
             <a:r>
               <a:rPr sz="1400" b="0" i="1">
-                <a:solidFill>
-                  <a:srgbClr val="BBBBBB"/>
-                </a:solidFill>
-                <a:latin typeface="Calibri"/>
+                <a:solidFill>val="9AA7B6"/&gt;</a:solidFill>
+                <a:latin typeface="Poppins"/>
               </a:rPr>
               <a:t>Année universitaire 2026-2027 / Academic Year 2026-2027</a:t>
             </a:r>
@@ -3545,10 +3523,8 @@
             <a:pPr algn="ctr"/>
             <a:r>
               <a:rPr sz="1200" b="0" i="1">
-                <a:solidFill>
-                  <a:srgbClr val="BBBBBB"/>
-                </a:solidFill>
-                <a:latin typeface="Calibri"/>
+                <a:solidFill>val="9AA7B6"/&gt;</a:solidFill>
+                <a:latin typeface="Poppins"/>
               </a:rPr>
               <a:t>Université de Mostaganem - Département Mathématiques et Informatique</a:t>
             </a:r>
@@ -3579,6 +3555,47 @@
           </a:prstGeom>
         </p:spPr>
       </p:pic>
+      <p:sp>
+        <p:nvSpPr>
+          <p:cNvPr id="990001" name="Pied de page FLE"/>
+          <p:cNvSpPr>
+            <a:spLocks noGrp="1"/>
+          </p:cNvSpPr>
+          <p:nvPr/>
+        </p:nvSpPr>
+        <p:spPr>
+          <a:xfrm>
+            <a:off x="4343400" y="-329184"/>
+            <a:ext cx="4572000" cy="274320"/>
+          </a:xfrm>
+          <a:prstGeom prst="rect">
+            <a:avLst/>
+          </a:prstGeom>
+        </p:spPr>
+        <p:txBody>
+          <a:bodyPr anchor="b"/>
+          <a:lstStyle/>
+          <a:p>
+            <a:pPr algn="r">
+              <a:defRPr sz="900">
+                <a:solidFill>
+                  <a:srgbClr val="9AA7B6"/>
+                </a:solidFill>
+                <a:latin typeface="Poppins"/>
+              </a:defRPr>
+            </a:pPr>
+            <a:r>
+              <a:rPr lang="fr-FR" sz="900">
+                <a:solidFill>
+                  <a:srgbClr val="9AA7B6"/>
+                </a:solidFill>
+                <a:latin typeface="Poppins"/>
+              </a:rPr>
+              <a:t>Université de Mostaganem — Dr. Madani BELACEL</a:t>
+            </a:r>
+          </a:p>
+        </p:txBody>
+      </p:sp>
     </p:spTree>
   </p:cSld>
   <p:clrMapOvr>
@@ -3592,9 +3609,7 @@
   <p:cSld>
     <p:bg>
       <p:bgPr>
-        <a:solidFill>
-          <a:srgbClr val="0B3D2E"/>
-        </a:solidFill>
+        <a:solidFill>val="004A38"/&gt;</a:solidFill>
         <a:effectLst/>
       </p:bgPr>
     </p:bg>
@@ -3619,9 +3634,7 @@
           <a:prstGeom prst="rect">
             <a:avLst/>
           </a:prstGeom>
-          <a:solidFill>
-            <a:srgbClr val="146B4A"/>
-          </a:solidFill>
+          <a:solidFill>val="007A55"/&gt;</a:solidFill>
           <a:ln>
             <a:noFill/>
           </a:ln>
@@ -3663,9 +3676,7 @@
           <a:prstGeom prst="rect">
             <a:avLst/>
           </a:prstGeom>
-          <a:solidFill>
-            <a:srgbClr val="FFD700"/>
-          </a:solidFill>
+          <a:solidFill>val="F0B429"/&gt;</a:solidFill>
           <a:ln>
             <a:noFill/>
           </a:ln>
@@ -3707,9 +3718,7 @@
           <a:prstGeom prst="rect">
             <a:avLst/>
           </a:prstGeom>
-          <a:solidFill>
-            <a:srgbClr val="FFD700"/>
-          </a:solidFill>
+          <a:solidFill>val="F0B429"/&gt;</a:solidFill>
           <a:ln>
             <a:noFill/>
           </a:ln>
@@ -3751,9 +3760,7 @@
           <a:prstGeom prst="rect">
             <a:avLst/>
           </a:prstGeom>
-          <a:solidFill>
-            <a:srgbClr val="146B4A"/>
-          </a:solidFill>
+          <a:solidFill>val="007A55"/&gt;</a:solidFill>
           <a:ln>
             <a:noFill/>
           </a:ln>
@@ -3806,10 +3813,8 @@
             <a:pPr algn="l"/>
             <a:r>
               <a:rPr sz="2400" b="1" i="0">
-                <a:solidFill>
-                  <a:srgbClr val="FFD700"/>
-                </a:solidFill>
-                <a:latin typeface="Calibri"/>
+                <a:solidFill>val="F0B429"/&gt;</a:solidFill>
+                <a:latin typeface="Poppins"/>
               </a:rPr>
               <a:t>4 - Animations and Transitions</a:t>
             </a:r>
@@ -3830,9 +3835,7 @@
           <a:prstGeom prst="rect">
             <a:avLst/>
           </a:prstGeom>
-          <a:solidFill>
-            <a:srgbClr val="146B4A"/>
-          </a:solidFill>
+          <a:solidFill>val="007A55"/&gt;</a:solidFill>
           <a:ln>
             <a:noFill/>
           </a:ln>
@@ -3889,10 +3892,8 @@
             </a:pPr>
             <a:r>
               <a:rPr sz="1800">
-                <a:solidFill>
-                  <a:srgbClr val="FFFFFF"/>
-                </a:solidFill>
-                <a:latin typeface="Calibri"/>
+                <a:solidFill>val="FFFFFF"/&gt;</a:solidFill>
+                <a:latin typeface="Poppins"/>
               </a:rPr>
               <a:t>▪  Transitions: effects between two slides (fade, wipe).</a:t>
             </a:r>
@@ -3905,10 +3906,8 @@
             </a:pPr>
             <a:r>
               <a:rPr sz="1800">
-                <a:solidFill>
-                  <a:srgbClr val="FFFFFF"/>
-                </a:solidFill>
-                <a:latin typeface="Calibri"/>
+                <a:solidFill>val="FFFFFF"/&gt;</a:solidFill>
+                <a:latin typeface="Poppins"/>
               </a:rPr>
               <a:t>▪  Animations: object effects (entrance, emphasis, exit).</a:t>
             </a:r>
@@ -3921,10 +3920,8 @@
             </a:pPr>
             <a:r>
               <a:rPr sz="1800">
-                <a:solidFill>
-                  <a:srgbClr val="FFFFFF"/>
-                </a:solidFill>
-                <a:latin typeface="Calibri"/>
+                <a:solidFill>val="FFFFFF"/&gt;</a:solidFill>
+                <a:latin typeface="Poppins"/>
               </a:rPr>
               <a:t>▪  Animation order and timing.</a:t>
             </a:r>
@@ -3937,10 +3934,8 @@
             </a:pPr>
             <a:r>
               <a:rPr sz="1800">
-                <a:solidFill>
-                  <a:srgbClr val="FFFFFF"/>
-                </a:solidFill>
-                <a:latin typeface="Calibri"/>
+                <a:solidFill>val="FFFFFF"/&gt;</a:solidFill>
+                <a:latin typeface="Poppins"/>
               </a:rPr>
               <a:t>▪  Golden rule: keep it sober to stay professional.</a:t>
             </a:r>
@@ -3971,6 +3966,47 @@
           </a:prstGeom>
         </p:spPr>
       </p:pic>
+      <p:sp>
+        <p:nvSpPr>
+          <p:cNvPr id="990001" name="Pied de page FLE"/>
+          <p:cNvSpPr>
+            <a:spLocks noGrp="1"/>
+          </p:cNvSpPr>
+          <p:nvPr/>
+        </p:nvSpPr>
+        <p:spPr>
+          <a:xfrm>
+            <a:off x="4343400" y="-329184"/>
+            <a:ext cx="4572000" cy="274320"/>
+          </a:xfrm>
+          <a:prstGeom prst="rect">
+            <a:avLst/>
+          </a:prstGeom>
+        </p:spPr>
+        <p:txBody>
+          <a:bodyPr anchor="b"/>
+          <a:lstStyle/>
+          <a:p>
+            <a:pPr algn="r">
+              <a:defRPr sz="900">
+                <a:solidFill>
+                  <a:srgbClr val="9AA7B6"/>
+                </a:solidFill>
+                <a:latin typeface="Poppins"/>
+              </a:defRPr>
+            </a:pPr>
+            <a:r>
+              <a:rPr lang="fr-FR" sz="900">
+                <a:solidFill>
+                  <a:srgbClr val="9AA7B6"/>
+                </a:solidFill>
+                <a:latin typeface="Poppins"/>
+              </a:rPr>
+              <a:t>Université de Mostaganem — Dr. Madani BELACEL</a:t>
+            </a:r>
+          </a:p>
+        </p:txBody>
+      </p:sp>
     </p:spTree>
   </p:cSld>
   <p:clrMapOvr>
@@ -3984,9 +4020,7 @@
   <p:cSld>
     <p:bg>
       <p:bgPr>
-        <a:solidFill>
-          <a:srgbClr val="0B3D2E"/>
-        </a:solidFill>
+        <a:solidFill>val="004A38"/&gt;</a:solidFill>
         <a:effectLst/>
       </p:bgPr>
     </p:bg>
@@ -4011,9 +4045,7 @@
           <a:prstGeom prst="rect">
             <a:avLst/>
           </a:prstGeom>
-          <a:solidFill>
-            <a:srgbClr val="146B4A"/>
-          </a:solidFill>
+          <a:solidFill>val="007A55"/&gt;</a:solidFill>
           <a:ln>
             <a:noFill/>
           </a:ln>
@@ -4055,9 +4087,7 @@
           <a:prstGeom prst="rect">
             <a:avLst/>
           </a:prstGeom>
-          <a:solidFill>
-            <a:srgbClr val="FFD700"/>
-          </a:solidFill>
+          <a:solidFill>val="F0B429"/&gt;</a:solidFill>
           <a:ln>
             <a:noFill/>
           </a:ln>
@@ -4099,9 +4129,7 @@
           <a:prstGeom prst="rect">
             <a:avLst/>
           </a:prstGeom>
-          <a:solidFill>
-            <a:srgbClr val="FFD700"/>
-          </a:solidFill>
+          <a:solidFill>val="F0B429"/&gt;</a:solidFill>
           <a:ln>
             <a:noFill/>
           </a:ln>
@@ -4143,9 +4171,7 @@
           <a:prstGeom prst="rect">
             <a:avLst/>
           </a:prstGeom>
-          <a:solidFill>
-            <a:srgbClr val="146B4A"/>
-          </a:solidFill>
+          <a:solidFill>val="007A55"/&gt;</a:solidFill>
           <a:ln>
             <a:noFill/>
           </a:ln>
@@ -4187,9 +4213,7 @@
           <a:prstGeom prst="rect">
             <a:avLst/>
           </a:prstGeom>
-          <a:solidFill>
-            <a:srgbClr val="146B4A"/>
-          </a:solidFill>
+          <a:solidFill>val="007A55"/&gt;</a:solidFill>
           <a:ln>
             <a:noFill/>
           </a:ln>
@@ -4242,10 +4266,8 @@
             <a:pPr algn="ctr"/>
             <a:r>
               <a:rPr sz="2200" b="1" i="0">
-                <a:solidFill>
-                  <a:srgbClr val="BBBBBB"/>
-                </a:solidFill>
-                <a:latin typeface="Calibri"/>
+                <a:solidFill>val="9AA7B6"/&gt;</a:solidFill>
+                <a:latin typeface="Poppins"/>
               </a:rPr>
               <a:t>Section 5</a:t>
             </a:r>
@@ -4277,10 +4299,8 @@
             <a:pPr algn="ctr"/>
             <a:r>
               <a:rPr sz="2800" b="1" i="0">
-                <a:solidFill>
-                  <a:srgbClr val="FFD700"/>
-                </a:solidFill>
-                <a:latin typeface="Calibri"/>
+                <a:solidFill>val="F0B429"/&gt;</a:solidFill>
+                <a:latin typeface="Poppins"/>
               </a:rPr>
               <a:t>Slideshow Mode</a:t>
             </a:r>
@@ -4311,6 +4331,47 @@
           </a:prstGeom>
         </p:spPr>
       </p:pic>
+      <p:sp>
+        <p:nvSpPr>
+          <p:cNvPr id="990001" name="Pied de page FLE"/>
+          <p:cNvSpPr>
+            <a:spLocks noGrp="1"/>
+          </p:cNvSpPr>
+          <p:nvPr/>
+        </p:nvSpPr>
+        <p:spPr>
+          <a:xfrm>
+            <a:off x="4343400" y="-329184"/>
+            <a:ext cx="4572000" cy="274320"/>
+          </a:xfrm>
+          <a:prstGeom prst="rect">
+            <a:avLst/>
+          </a:prstGeom>
+        </p:spPr>
+        <p:txBody>
+          <a:bodyPr anchor="b"/>
+          <a:lstStyle/>
+          <a:p>
+            <a:pPr algn="r">
+              <a:defRPr sz="900">
+                <a:solidFill>
+                  <a:srgbClr val="9AA7B6"/>
+                </a:solidFill>
+                <a:latin typeface="Poppins"/>
+              </a:defRPr>
+            </a:pPr>
+            <a:r>
+              <a:rPr lang="fr-FR" sz="900">
+                <a:solidFill>
+                  <a:srgbClr val="9AA7B6"/>
+                </a:solidFill>
+                <a:latin typeface="Poppins"/>
+              </a:rPr>
+              <a:t>Université de Mostaganem — Dr. Madani BELACEL</a:t>
+            </a:r>
+          </a:p>
+        </p:txBody>
+      </p:sp>
     </p:spTree>
   </p:cSld>
   <p:clrMapOvr>
@@ -4324,9 +4385,7 @@
   <p:cSld>
     <p:bg>
       <p:bgPr>
-        <a:solidFill>
-          <a:srgbClr val="0B3D2E"/>
-        </a:solidFill>
+        <a:solidFill>val="004A38"/&gt;</a:solidFill>
         <a:effectLst/>
       </p:bgPr>
     </p:bg>
@@ -4351,9 +4410,7 @@
           <a:prstGeom prst="rect">
             <a:avLst/>
           </a:prstGeom>
-          <a:solidFill>
-            <a:srgbClr val="146B4A"/>
-          </a:solidFill>
+          <a:solidFill>val="007A55"/&gt;</a:solidFill>
           <a:ln>
             <a:noFill/>
           </a:ln>
@@ -4395,9 +4452,7 @@
           <a:prstGeom prst="rect">
             <a:avLst/>
           </a:prstGeom>
-          <a:solidFill>
-            <a:srgbClr val="FFD700"/>
-          </a:solidFill>
+          <a:solidFill>val="F0B429"/&gt;</a:solidFill>
           <a:ln>
             <a:noFill/>
           </a:ln>
@@ -4439,9 +4494,7 @@
           <a:prstGeom prst="rect">
             <a:avLst/>
           </a:prstGeom>
-          <a:solidFill>
-            <a:srgbClr val="FFD700"/>
-          </a:solidFill>
+          <a:solidFill>val="F0B429"/&gt;</a:solidFill>
           <a:ln>
             <a:noFill/>
           </a:ln>
@@ -4483,9 +4536,7 @@
           <a:prstGeom prst="rect">
             <a:avLst/>
           </a:prstGeom>
-          <a:solidFill>
-            <a:srgbClr val="146B4A"/>
-          </a:solidFill>
+          <a:solidFill>val="007A55"/&gt;</a:solidFill>
           <a:ln>
             <a:noFill/>
           </a:ln>
@@ -4538,10 +4589,8 @@
             <a:pPr algn="l"/>
             <a:r>
               <a:rPr sz="2400" b="1" i="0">
-                <a:solidFill>
-                  <a:srgbClr val="FFD700"/>
-                </a:solidFill>
-                <a:latin typeface="Calibri"/>
+                <a:solidFill>val="F0B429"/&gt;</a:solidFill>
+                <a:latin typeface="Poppins"/>
               </a:rPr>
               <a:t>5 - Slideshow Mode</a:t>
             </a:r>
@@ -4562,9 +4611,7 @@
           <a:prstGeom prst="rect">
             <a:avLst/>
           </a:prstGeom>
-          <a:solidFill>
-            <a:srgbClr val="146B4A"/>
-          </a:solidFill>
+          <a:solidFill>val="007A55"/&gt;</a:solidFill>
           <a:ln>
             <a:noFill/>
           </a:ln>
@@ -4621,10 +4668,8 @@
             </a:pPr>
             <a:r>
               <a:rPr sz="1800">
-                <a:solidFill>
-                  <a:srgbClr val="FFFFFF"/>
-                </a:solidFill>
-                <a:latin typeface="Calibri"/>
+                <a:solidFill>val="FFFFFF"/&gt;</a:solidFill>
+                <a:latin typeface="Poppins"/>
               </a:rPr>
               <a:t>▪  Start: F5 (from beginning) / Shift+F5 (current slide).</a:t>
             </a:r>
@@ -4637,10 +4682,8 @@
             </a:pPr>
             <a:r>
               <a:rPr sz="1800">
-                <a:solidFill>
-                  <a:srgbClr val="FFFFFF"/>
-                </a:solidFill>
-                <a:latin typeface="Calibri"/>
+                <a:solidFill>val="FFFFFF"/&gt;</a:solidFill>
+                <a:latin typeface="Poppins"/>
               </a:rPr>
               <a:t>▪  Navigate: click, arrows, wheel; Esc to quit.</a:t>
             </a:r>
@@ -4653,10 +4696,8 @@
             </a:pPr>
             <a:r>
               <a:rPr sz="1800">
-                <a:solidFill>
-                  <a:srgbClr val="FFFFFF"/>
-                </a:solidFill>
-                <a:latin typeface="Calibri"/>
+                <a:solidFill>val="FFFFFF"/&gt;</a:solidFill>
+                <a:latin typeface="Poppins"/>
               </a:rPr>
               <a:t>▪  Virtual pen, annotations, black/white screen.</a:t>
             </a:r>
@@ -4669,10 +4710,8 @@
             </a:pPr>
             <a:r>
               <a:rPr sz="1800">
-                <a:solidFill>
-                  <a:srgbClr val="FFFFFF"/>
-                </a:solidFill>
-                <a:latin typeface="Calibri"/>
+                <a:solidFill>val="FFFFFF"/&gt;</a:solidFill>
+                <a:latin typeface="Poppins"/>
               </a:rPr>
               <a:t>▪  Presenter view: private notes and timer.</a:t>
             </a:r>
@@ -4703,6 +4742,47 @@
           </a:prstGeom>
         </p:spPr>
       </p:pic>
+      <p:sp>
+        <p:nvSpPr>
+          <p:cNvPr id="990001" name="Pied de page FLE"/>
+          <p:cNvSpPr>
+            <a:spLocks noGrp="1"/>
+          </p:cNvSpPr>
+          <p:nvPr/>
+        </p:nvSpPr>
+        <p:spPr>
+          <a:xfrm>
+            <a:off x="4343400" y="-329184"/>
+            <a:ext cx="4572000" cy="274320"/>
+          </a:xfrm>
+          <a:prstGeom prst="rect">
+            <a:avLst/>
+          </a:prstGeom>
+        </p:spPr>
+        <p:txBody>
+          <a:bodyPr anchor="b"/>
+          <a:lstStyle/>
+          <a:p>
+            <a:pPr algn="r">
+              <a:defRPr sz="900">
+                <a:solidFill>
+                  <a:srgbClr val="9AA7B6"/>
+                </a:solidFill>
+                <a:latin typeface="Poppins"/>
+              </a:defRPr>
+            </a:pPr>
+            <a:r>
+              <a:rPr lang="fr-FR" sz="900">
+                <a:solidFill>
+                  <a:srgbClr val="9AA7B6"/>
+                </a:solidFill>
+                <a:latin typeface="Poppins"/>
+              </a:rPr>
+              <a:t>Université de Mostaganem — Dr. Madani BELACEL</a:t>
+            </a:r>
+          </a:p>
+        </p:txBody>
+      </p:sp>
     </p:spTree>
   </p:cSld>
   <p:clrMapOvr>
@@ -4716,9 +4796,7 @@
   <p:cSld>
     <p:bg>
       <p:bgPr>
-        <a:solidFill>
-          <a:srgbClr val="0B3D2E"/>
-        </a:solidFill>
+        <a:solidFill>val="004A38"/&gt;</a:solidFill>
         <a:effectLst/>
       </p:bgPr>
     </p:bg>
@@ -4743,9 +4821,7 @@
           <a:prstGeom prst="rect">
             <a:avLst/>
           </a:prstGeom>
-          <a:solidFill>
-            <a:srgbClr val="146B4A"/>
-          </a:solidFill>
+          <a:solidFill>val="007A55"/&gt;</a:solidFill>
           <a:ln>
             <a:noFill/>
           </a:ln>
@@ -4787,9 +4863,7 @@
           <a:prstGeom prst="rect">
             <a:avLst/>
           </a:prstGeom>
-          <a:solidFill>
-            <a:srgbClr val="FFD700"/>
-          </a:solidFill>
+          <a:solidFill>val="F0B429"/&gt;</a:solidFill>
           <a:ln>
             <a:noFill/>
           </a:ln>
@@ -4831,9 +4905,7 @@
           <a:prstGeom prst="rect">
             <a:avLst/>
           </a:prstGeom>
-          <a:solidFill>
-            <a:srgbClr val="FFD700"/>
-          </a:solidFill>
+          <a:solidFill>val="F0B429"/&gt;</a:solidFill>
           <a:ln>
             <a:noFill/>
           </a:ln>
@@ -4875,9 +4947,7 @@
           <a:prstGeom prst="rect">
             <a:avLst/>
           </a:prstGeom>
-          <a:solidFill>
-            <a:srgbClr val="146B4A"/>
-          </a:solidFill>
+          <a:solidFill>val="007A55"/&gt;</a:solidFill>
           <a:ln>
             <a:noFill/>
           </a:ln>
@@ -4919,9 +4989,7 @@
           <a:prstGeom prst="rect">
             <a:avLst/>
           </a:prstGeom>
-          <a:solidFill>
-            <a:srgbClr val="146B4A"/>
-          </a:solidFill>
+          <a:solidFill>val="007A55"/&gt;</a:solidFill>
           <a:ln>
             <a:noFill/>
           </a:ln>
@@ -4974,10 +5042,8 @@
             <a:pPr algn="ctr"/>
             <a:r>
               <a:rPr sz="2200" b="1" i="0">
-                <a:solidFill>
-                  <a:srgbClr val="BBBBBB"/>
-                </a:solidFill>
-                <a:latin typeface="Calibri"/>
+                <a:solidFill>val="9AA7B6"/&gt;</a:solidFill>
+                <a:latin typeface="Poppins"/>
               </a:rPr>
               <a:t>Section 6</a:t>
             </a:r>
@@ -5009,10 +5075,8 @@
             <a:pPr algn="ctr"/>
             <a:r>
               <a:rPr sz="2800" b="1" i="0">
-                <a:solidFill>
-                  <a:srgbClr val="FFD700"/>
-                </a:solidFill>
-                <a:latin typeface="Calibri"/>
+                <a:solidFill>val="F0B429"/&gt;</a:solidFill>
+                <a:latin typeface="Poppins"/>
               </a:rPr>
               <a:t>Designing Good Slides</a:t>
             </a:r>
@@ -5043,6 +5107,47 @@
           </a:prstGeom>
         </p:spPr>
       </p:pic>
+      <p:sp>
+        <p:nvSpPr>
+          <p:cNvPr id="990001" name="Pied de page FLE"/>
+          <p:cNvSpPr>
+            <a:spLocks noGrp="1"/>
+          </p:cNvSpPr>
+          <p:nvPr/>
+        </p:nvSpPr>
+        <p:spPr>
+          <a:xfrm>
+            <a:off x="4343400" y="-329184"/>
+            <a:ext cx="4572000" cy="274320"/>
+          </a:xfrm>
+          <a:prstGeom prst="rect">
+            <a:avLst/>
+          </a:prstGeom>
+        </p:spPr>
+        <p:txBody>
+          <a:bodyPr anchor="b"/>
+          <a:lstStyle/>
+          <a:p>
+            <a:pPr algn="r">
+              <a:defRPr sz="900">
+                <a:solidFill>
+                  <a:srgbClr val="9AA7B6"/>
+                </a:solidFill>
+                <a:latin typeface="Poppins"/>
+              </a:defRPr>
+            </a:pPr>
+            <a:r>
+              <a:rPr lang="fr-FR" sz="900">
+                <a:solidFill>
+                  <a:srgbClr val="9AA7B6"/>
+                </a:solidFill>
+                <a:latin typeface="Poppins"/>
+              </a:rPr>
+              <a:t>Université de Mostaganem — Dr. Madani BELACEL</a:t>
+            </a:r>
+          </a:p>
+        </p:txBody>
+      </p:sp>
     </p:spTree>
   </p:cSld>
   <p:clrMapOvr>
@@ -5056,9 +5161,7 @@
   <p:cSld>
     <p:bg>
       <p:bgPr>
-        <a:solidFill>
-          <a:srgbClr val="0B3D2E"/>
-        </a:solidFill>
+        <a:solidFill>val="004A38"/&gt;</a:solidFill>
         <a:effectLst/>
       </p:bgPr>
     </p:bg>
@@ -5083,9 +5186,7 @@
           <a:prstGeom prst="rect">
             <a:avLst/>
           </a:prstGeom>
-          <a:solidFill>
-            <a:srgbClr val="146B4A"/>
-          </a:solidFill>
+          <a:solidFill>val="007A55"/&gt;</a:solidFill>
           <a:ln>
             <a:noFill/>
           </a:ln>
@@ -5127,9 +5228,7 @@
           <a:prstGeom prst="rect">
             <a:avLst/>
           </a:prstGeom>
-          <a:solidFill>
-            <a:srgbClr val="FFD700"/>
-          </a:solidFill>
+          <a:solidFill>val="F0B429"/&gt;</a:solidFill>
           <a:ln>
             <a:noFill/>
           </a:ln>
@@ -5171,9 +5270,7 @@
           <a:prstGeom prst="rect">
             <a:avLst/>
           </a:prstGeom>
-          <a:solidFill>
-            <a:srgbClr val="FFD700"/>
-          </a:solidFill>
+          <a:solidFill>val="F0B429"/&gt;</a:solidFill>
           <a:ln>
             <a:noFill/>
           </a:ln>
@@ -5215,9 +5312,7 @@
           <a:prstGeom prst="rect">
             <a:avLst/>
           </a:prstGeom>
-          <a:solidFill>
-            <a:srgbClr val="146B4A"/>
-          </a:solidFill>
+          <a:solidFill>val="007A55"/&gt;</a:solidFill>
           <a:ln>
             <a:noFill/>
           </a:ln>
@@ -5270,10 +5365,8 @@
             <a:pPr algn="l"/>
             <a:r>
               <a:rPr sz="2400" b="1" i="0">
-                <a:solidFill>
-                  <a:srgbClr val="FFD700"/>
-                </a:solidFill>
-                <a:latin typeface="Calibri"/>
+                <a:solidFill>val="F0B429"/&gt;</a:solidFill>
+                <a:latin typeface="Poppins"/>
               </a:rPr>
               <a:t>6 - Designing Good Slides</a:t>
             </a:r>
@@ -5294,9 +5387,7 @@
           <a:prstGeom prst="rect">
             <a:avLst/>
           </a:prstGeom>
-          <a:solidFill>
-            <a:srgbClr val="146B4A"/>
-          </a:solidFill>
+          <a:solidFill>val="007A55"/&gt;</a:solidFill>
           <a:ln>
             <a:noFill/>
           </a:ln>
@@ -5353,10 +5444,8 @@
             </a:pPr>
             <a:r>
               <a:rPr sz="1800">
-                <a:solidFill>
-                  <a:srgbClr val="FFFFFF"/>
-                </a:solidFill>
-                <a:latin typeface="Calibri"/>
+                <a:solidFill>val="FFFFFF"/&gt;</a:solidFill>
+                <a:latin typeface="Poppins"/>
               </a:rPr>
               <a:t>▪  Clear structure: title, outline, body, conclusion.</a:t>
             </a:r>
@@ -5369,10 +5458,8 @@
             </a:pPr>
             <a:r>
               <a:rPr sz="1800">
-                <a:solidFill>
-                  <a:srgbClr val="FFFFFF"/>
-                </a:solidFill>
-                <a:latin typeface="Calibri"/>
+                <a:solidFill>val="FFFFFF"/&gt;</a:solidFill>
+                <a:latin typeface="Poppins"/>
               </a:rPr>
               <a:t>▪  Little text, many visual examples.</a:t>
             </a:r>
@@ -5385,10 +5472,8 @@
             </a:pPr>
             <a:r>
               <a:rPr sz="1800">
-                <a:solidFill>
-                  <a:srgbClr val="FFFFFF"/>
-                </a:solidFill>
-                <a:latin typeface="Calibri"/>
+                <a:solidFill>val="FFFFFF"/&gt;</a:solidFill>
+                <a:latin typeface="Poppins"/>
               </a:rPr>
               <a:t>▪  Readable contrast: dark background + light text.</a:t>
             </a:r>
@@ -5401,10 +5486,8 @@
             </a:pPr>
             <a:r>
               <a:rPr sz="1800">
-                <a:solidFill>
-                  <a:srgbClr val="FFFFFF"/>
-                </a:solidFill>
-                <a:latin typeface="Calibri"/>
+                <a:solidFill>val="FFFFFF"/&gt;</a:solidFill>
+                <a:latin typeface="Poppins"/>
               </a:rPr>
               <a:t>▪  Consistent fonts and colors.</a:t>
             </a:r>
@@ -5417,10 +5500,8 @@
             </a:pPr>
             <a:r>
               <a:rPr sz="1800">
-                <a:solidFill>
-                  <a:srgbClr val="FFFFFF"/>
-                </a:solidFill>
-                <a:latin typeface="Calibri"/>
+                <a:solidFill>val="FFFFFF"/&gt;</a:solidFill>
+                <a:latin typeface="Poppins"/>
               </a:rPr>
               <a:t>▪  Rehearse and time your presentation.</a:t>
             </a:r>
@@ -5451,6 +5532,47 @@
           </a:prstGeom>
         </p:spPr>
       </p:pic>
+      <p:sp>
+        <p:nvSpPr>
+          <p:cNvPr id="990001" name="Pied de page FLE"/>
+          <p:cNvSpPr>
+            <a:spLocks noGrp="1"/>
+          </p:cNvSpPr>
+          <p:nvPr/>
+        </p:nvSpPr>
+        <p:spPr>
+          <a:xfrm>
+            <a:off x="4343400" y="-329184"/>
+            <a:ext cx="4572000" cy="274320"/>
+          </a:xfrm>
+          <a:prstGeom prst="rect">
+            <a:avLst/>
+          </a:prstGeom>
+        </p:spPr>
+        <p:txBody>
+          <a:bodyPr anchor="b"/>
+          <a:lstStyle/>
+          <a:p>
+            <a:pPr algn="r">
+              <a:defRPr sz="900">
+                <a:solidFill>
+                  <a:srgbClr val="9AA7B6"/>
+                </a:solidFill>
+                <a:latin typeface="Poppins"/>
+              </a:defRPr>
+            </a:pPr>
+            <a:r>
+              <a:rPr lang="fr-FR" sz="900">
+                <a:solidFill>
+                  <a:srgbClr val="9AA7B6"/>
+                </a:solidFill>
+                <a:latin typeface="Poppins"/>
+              </a:rPr>
+              <a:t>Université de Mostaganem — Dr. Madani BELACEL</a:t>
+            </a:r>
+          </a:p>
+        </p:txBody>
+      </p:sp>
     </p:spTree>
   </p:cSld>
   <p:clrMapOvr>
@@ -5464,9 +5586,7 @@
   <p:cSld>
     <p:bg>
       <p:bgPr>
-        <a:solidFill>
-          <a:srgbClr val="0B3D2E"/>
-        </a:solidFill>
+        <a:solidFill>val="004A38"/&gt;</a:solidFill>
         <a:effectLst/>
       </p:bgPr>
     </p:bg>
@@ -5491,9 +5611,7 @@
           <a:prstGeom prst="rect">
             <a:avLst/>
           </a:prstGeom>
-          <a:solidFill>
-            <a:srgbClr val="146B4A"/>
-          </a:solidFill>
+          <a:solidFill>val="007A55"/&gt;</a:solidFill>
           <a:ln>
             <a:noFill/>
           </a:ln>
@@ -5535,9 +5653,7 @@
           <a:prstGeom prst="rect">
             <a:avLst/>
           </a:prstGeom>
-          <a:solidFill>
-            <a:srgbClr val="FFD700"/>
-          </a:solidFill>
+          <a:solidFill>val="F0B429"/&gt;</a:solidFill>
           <a:ln>
             <a:noFill/>
           </a:ln>
@@ -5579,9 +5695,7 @@
           <a:prstGeom prst="rect">
             <a:avLst/>
           </a:prstGeom>
-          <a:solidFill>
-            <a:srgbClr val="FFD700"/>
-          </a:solidFill>
+          <a:solidFill>val="F0B429"/&gt;</a:solidFill>
           <a:ln>
             <a:noFill/>
           </a:ln>
@@ -5623,9 +5737,7 @@
           <a:prstGeom prst="rect">
             <a:avLst/>
           </a:prstGeom>
-          <a:solidFill>
-            <a:srgbClr val="146B4A"/>
-          </a:solidFill>
+          <a:solidFill>val="007A55"/&gt;</a:solidFill>
           <a:ln>
             <a:noFill/>
           </a:ln>
@@ -5667,9 +5779,7 @@
           <a:prstGeom prst="rect">
             <a:avLst/>
           </a:prstGeom>
-          <a:solidFill>
-            <a:srgbClr val="146B4A"/>
-          </a:solidFill>
+          <a:solidFill>val="007A55"/&gt;</a:solidFill>
           <a:ln>
             <a:noFill/>
           </a:ln>
@@ -5722,10 +5832,8 @@
             <a:pPr algn="ctr"/>
             <a:r>
               <a:rPr sz="2200" b="1" i="0">
-                <a:solidFill>
-                  <a:srgbClr val="BBBBBB"/>
-                </a:solidFill>
-                <a:latin typeface="Calibri"/>
+                <a:solidFill>val="9AA7B6"/&gt;</a:solidFill>
+                <a:latin typeface="Poppins"/>
               </a:rPr>
               <a:t>Section 7</a:t>
             </a:r>
@@ -5757,10 +5865,8 @@
             <a:pPr algn="ctr"/>
             <a:r>
               <a:rPr sz="2800" b="1" i="0">
-                <a:solidFill>
-                  <a:srgbClr val="FFD700"/>
-                </a:solidFill>
-                <a:latin typeface="Calibri"/>
+                <a:solidFill>val="F0B429"/&gt;</a:solidFill>
+                <a:latin typeface="Poppins"/>
               </a:rPr>
               <a:t>Sharing and Distributing</a:t>
             </a:r>
@@ -5791,6 +5897,47 @@
           </a:prstGeom>
         </p:spPr>
       </p:pic>
+      <p:sp>
+        <p:nvSpPr>
+          <p:cNvPr id="990001" name="Pied de page FLE"/>
+          <p:cNvSpPr>
+            <a:spLocks noGrp="1"/>
+          </p:cNvSpPr>
+          <p:nvPr/>
+        </p:nvSpPr>
+        <p:spPr>
+          <a:xfrm>
+            <a:off x="4343400" y="-329184"/>
+            <a:ext cx="4572000" cy="274320"/>
+          </a:xfrm>
+          <a:prstGeom prst="rect">
+            <a:avLst/>
+          </a:prstGeom>
+        </p:spPr>
+        <p:txBody>
+          <a:bodyPr anchor="b"/>
+          <a:lstStyle/>
+          <a:p>
+            <a:pPr algn="r">
+              <a:defRPr sz="900">
+                <a:solidFill>
+                  <a:srgbClr val="9AA7B6"/>
+                </a:solidFill>
+                <a:latin typeface="Poppins"/>
+              </a:defRPr>
+            </a:pPr>
+            <a:r>
+              <a:rPr lang="fr-FR" sz="900">
+                <a:solidFill>
+                  <a:srgbClr val="9AA7B6"/>
+                </a:solidFill>
+                <a:latin typeface="Poppins"/>
+              </a:rPr>
+              <a:t>Université de Mostaganem — Dr. Madani BELACEL</a:t>
+            </a:r>
+          </a:p>
+        </p:txBody>
+      </p:sp>
     </p:spTree>
   </p:cSld>
   <p:clrMapOvr>
@@ -5804,9 +5951,7 @@
   <p:cSld>
     <p:bg>
       <p:bgPr>
-        <a:solidFill>
-          <a:srgbClr val="0B3D2E"/>
-        </a:solidFill>
+        <a:solidFill>val="004A38"/&gt;</a:solidFill>
         <a:effectLst/>
       </p:bgPr>
     </p:bg>
@@ -5831,9 +5976,7 @@
           <a:prstGeom prst="rect">
             <a:avLst/>
           </a:prstGeom>
-          <a:solidFill>
-            <a:srgbClr val="146B4A"/>
-          </a:solidFill>
+          <a:solidFill>val="007A55"/&gt;</a:solidFill>
           <a:ln>
             <a:noFill/>
           </a:ln>
@@ -5875,9 +6018,7 @@
           <a:prstGeom prst="rect">
             <a:avLst/>
           </a:prstGeom>
-          <a:solidFill>
-            <a:srgbClr val="FFD700"/>
-          </a:solidFill>
+          <a:solidFill>val="F0B429"/&gt;</a:solidFill>
           <a:ln>
             <a:noFill/>
           </a:ln>
@@ -5919,9 +6060,7 @@
           <a:prstGeom prst="rect">
             <a:avLst/>
           </a:prstGeom>
-          <a:solidFill>
-            <a:srgbClr val="FFD700"/>
-          </a:solidFill>
+          <a:solidFill>val="F0B429"/&gt;</a:solidFill>
           <a:ln>
             <a:noFill/>
           </a:ln>
@@ -5963,9 +6102,7 @@
           <a:prstGeom prst="rect">
             <a:avLst/>
           </a:prstGeom>
-          <a:solidFill>
-            <a:srgbClr val="146B4A"/>
-          </a:solidFill>
+          <a:solidFill>val="007A55"/&gt;</a:solidFill>
           <a:ln>
             <a:noFill/>
           </a:ln>
@@ -6018,10 +6155,8 @@
             <a:pPr algn="l"/>
             <a:r>
               <a:rPr sz="2400" b="1" i="0">
-                <a:solidFill>
-                  <a:srgbClr val="FFD700"/>
-                </a:solidFill>
-                <a:latin typeface="Calibri"/>
+                <a:solidFill>val="F0B429"/&gt;</a:solidFill>
+                <a:latin typeface="Poppins"/>
               </a:rPr>
               <a:t>7 - Sharing and Distributing</a:t>
             </a:r>
@@ -6042,9 +6177,7 @@
           <a:prstGeom prst="rect">
             <a:avLst/>
           </a:prstGeom>
-          <a:solidFill>
-            <a:srgbClr val="146B4A"/>
-          </a:solidFill>
+          <a:solidFill>val="007A55"/&gt;</a:solidFill>
           <a:ln>
             <a:noFill/>
           </a:ln>
@@ -6101,10 +6234,8 @@
             </a:pPr>
             <a:r>
               <a:rPr sz="1800">
-                <a:solidFill>
-                  <a:srgbClr val="FFFFFF"/>
-                </a:solidFill>
-                <a:latin typeface="Calibri"/>
+                <a:solidFill>val="FFFFFF"/&gt;</a:solidFill>
+                <a:latin typeface="Poppins"/>
               </a:rPr>
               <a:t>▪  PDF export: universal sharing without animation.</a:t>
             </a:r>
@@ -6117,10 +6248,8 @@
             </a:pPr>
             <a:r>
               <a:rPr sz="1800">
-                <a:solidFill>
-                  <a:srgbClr val="FFFFFF"/>
-                </a:solidFill>
-                <a:latin typeface="Calibri"/>
+                <a:solidFill>val="FFFFFF"/&gt;</a:solidFill>
+                <a:latin typeface="Poppins"/>
               </a:rPr>
               <a:t>▪  MP4 video: self-running presentation.</a:t>
             </a:r>
@@ -6133,10 +6262,8 @@
             </a:pPr>
             <a:r>
               <a:rPr sz="1800">
-                <a:solidFill>
-                  <a:srgbClr val="FFFFFF"/>
-                </a:solidFill>
-                <a:latin typeface="Calibri"/>
+                <a:solidFill>val="FFFFFF"/&gt;</a:solidFill>
+                <a:latin typeface="Poppins"/>
               </a:rPr>
               <a:t>▪  Online delivery: Teams, Zoom, SharePoint.</a:t>
             </a:r>
@@ -6149,10 +6276,8 @@
             </a:pPr>
             <a:r>
               <a:rPr sz="1800">
-                <a:solidFill>
-                  <a:srgbClr val="FFFFFF"/>
-                </a:solidFill>
-                <a:latin typeface="Calibri"/>
+                <a:solidFill>val="FFFFFF"/&gt;</a:solidFill>
+                <a:latin typeface="Poppins"/>
               </a:rPr>
               <a:t>▪  File compression: images and media.</a:t>
             </a:r>
@@ -6183,6 +6308,47 @@
           </a:prstGeom>
         </p:spPr>
       </p:pic>
+      <p:sp>
+        <p:nvSpPr>
+          <p:cNvPr id="990001" name="Pied de page FLE"/>
+          <p:cNvSpPr>
+            <a:spLocks noGrp="1"/>
+          </p:cNvSpPr>
+          <p:nvPr/>
+        </p:nvSpPr>
+        <p:spPr>
+          <a:xfrm>
+            <a:off x="4343400" y="-329184"/>
+            <a:ext cx="4572000" cy="274320"/>
+          </a:xfrm>
+          <a:prstGeom prst="rect">
+            <a:avLst/>
+          </a:prstGeom>
+        </p:spPr>
+        <p:txBody>
+          <a:bodyPr anchor="b"/>
+          <a:lstStyle/>
+          <a:p>
+            <a:pPr algn="r">
+              <a:defRPr sz="900">
+                <a:solidFill>
+                  <a:srgbClr val="9AA7B6"/>
+                </a:solidFill>
+                <a:latin typeface="Poppins"/>
+              </a:defRPr>
+            </a:pPr>
+            <a:r>
+              <a:rPr lang="fr-FR" sz="900">
+                <a:solidFill>
+                  <a:srgbClr val="9AA7B6"/>
+                </a:solidFill>
+                <a:latin typeface="Poppins"/>
+              </a:rPr>
+              <a:t>Université de Mostaganem — Dr. Madani BELACEL</a:t>
+            </a:r>
+          </a:p>
+        </p:txBody>
+      </p:sp>
     </p:spTree>
   </p:cSld>
   <p:clrMapOvr>
@@ -6196,9 +6362,7 @@
   <p:cSld>
     <p:bg>
       <p:bgPr>
-        <a:solidFill>
-          <a:srgbClr val="FF8C00"/>
-        </a:solidFill>
+        <a:solidFill>val="F0B429"/&gt;</a:solidFill>
         <a:effectLst/>
       </p:bgPr>
     </p:bg>
@@ -6223,9 +6387,7 @@
           <a:prstGeom prst="rect">
             <a:avLst/>
           </a:prstGeom>
-          <a:solidFill>
-            <a:srgbClr val="146B4A"/>
-          </a:solidFill>
+          <a:solidFill>val="007A55"/&gt;</a:solidFill>
           <a:ln>
             <a:noFill/>
           </a:ln>
@@ -6267,9 +6429,7 @@
           <a:prstGeom prst="rect">
             <a:avLst/>
           </a:prstGeom>
-          <a:solidFill>
-            <a:srgbClr val="FFD700"/>
-          </a:solidFill>
+          <a:solidFill>val="F0B429"/&gt;</a:solidFill>
           <a:ln>
             <a:noFill/>
           </a:ln>
@@ -6311,9 +6471,7 @@
           <a:prstGeom prst="rect">
             <a:avLst/>
           </a:prstGeom>
-          <a:solidFill>
-            <a:srgbClr val="FFD700"/>
-          </a:solidFill>
+          <a:solidFill>val="F0B429"/&gt;</a:solidFill>
           <a:ln>
             <a:noFill/>
           </a:ln>
@@ -6355,9 +6513,7 @@
           <a:prstGeom prst="rect">
             <a:avLst/>
           </a:prstGeom>
-          <a:solidFill>
-            <a:srgbClr val="146B4A"/>
-          </a:solidFill>
+          <a:solidFill>val="007A55"/&gt;</a:solidFill>
           <a:ln>
             <a:noFill/>
           </a:ln>
@@ -6410,10 +6566,8 @@
             <a:pPr algn="ctr"/>
             <a:r>
               <a:rPr sz="3000" b="1" i="0">
-                <a:solidFill>
-                  <a:srgbClr val="0B3D2E"/>
-                </a:solidFill>
-                <a:latin typeface="Calibri"/>
+                <a:solidFill>val="004A38"/&gt;</a:solidFill>
+                <a:latin typeface="Poppins"/>
               </a:rPr>
               <a:t>Practical Interest</a:t>
             </a:r>
@@ -6449,10 +6603,8 @@
             </a:pPr>
             <a:r>
               <a:rPr sz="1700">
-                <a:solidFill>
-                  <a:srgbClr val="0B3D2E"/>
-                </a:solidFill>
-                <a:latin typeface="Calibri"/>
+                <a:solidFill>val="004A38"/&gt;</a:solidFill>
+                <a:latin typeface="Poppins"/>
               </a:rPr>
               <a:t>▪  Present your projects and talks professionally.</a:t>
             </a:r>
@@ -6465,10 +6617,8 @@
             </a:pPr>
             <a:r>
               <a:rPr sz="1700">
-                <a:solidFill>
-                  <a:srgbClr val="0B3D2E"/>
-                </a:solidFill>
-                <a:latin typeface="Calibri"/>
+                <a:solidFill>val="004A38"/&gt;</a:solidFill>
+                <a:latin typeface="Poppins"/>
               </a:rPr>
               <a:t>▪  Defenses: a good slideshow highlights your work.</a:t>
             </a:r>
@@ -6481,10 +6631,8 @@
             </a:pPr>
             <a:r>
               <a:rPr sz="1700">
-                <a:solidFill>
-                  <a:srgbClr val="0B3D2E"/>
-                </a:solidFill>
-                <a:latin typeface="Calibri"/>
+                <a:solidFill>val="004A38"/&gt;</a:solidFill>
+                <a:latin typeface="Poppins"/>
               </a:rPr>
               <a:t>▪  Teaching: pedagogical visual aids.</a:t>
             </a:r>
@@ -6497,10 +6645,8 @@
             </a:pPr>
             <a:r>
               <a:rPr sz="1700">
-                <a:solidFill>
-                  <a:srgbClr val="0B3D2E"/>
-                </a:solidFill>
-                <a:latin typeface="Calibri"/>
+                <a:solidFill>val="004A38"/&gt;</a:solidFill>
+                <a:latin typeface="Poppins"/>
               </a:rPr>
               <a:t>▪  Business communication: meetings and annual reports.</a:t>
             </a:r>
@@ -6531,6 +6677,47 @@
           </a:prstGeom>
         </p:spPr>
       </p:pic>
+      <p:sp>
+        <p:nvSpPr>
+          <p:cNvPr id="990001" name="Pied de page FLE"/>
+          <p:cNvSpPr>
+            <a:spLocks noGrp="1"/>
+          </p:cNvSpPr>
+          <p:nvPr/>
+        </p:nvSpPr>
+        <p:spPr>
+          <a:xfrm>
+            <a:off x="4343400" y="-329184"/>
+            <a:ext cx="4572000" cy="274320"/>
+          </a:xfrm>
+          <a:prstGeom prst="rect">
+            <a:avLst/>
+          </a:prstGeom>
+        </p:spPr>
+        <p:txBody>
+          <a:bodyPr anchor="b"/>
+          <a:lstStyle/>
+          <a:p>
+            <a:pPr algn="r">
+              <a:defRPr sz="900">
+                <a:solidFill>
+                  <a:srgbClr val="9AA7B6"/>
+                </a:solidFill>
+                <a:latin typeface="Poppins"/>
+              </a:defRPr>
+            </a:pPr>
+            <a:r>
+              <a:rPr lang="fr-FR" sz="900">
+                <a:solidFill>
+                  <a:srgbClr val="9AA7B6"/>
+                </a:solidFill>
+                <a:latin typeface="Poppins"/>
+              </a:rPr>
+              <a:t>Université de Mostaganem — Dr. Madani BELACEL</a:t>
+            </a:r>
+          </a:p>
+        </p:txBody>
+      </p:sp>
     </p:spTree>
   </p:cSld>
   <p:clrMapOvr>
@@ -6544,9 +6731,7 @@
   <p:cSld>
     <p:bg>
       <p:bgPr>
-        <a:solidFill>
-          <a:srgbClr val="0B3D2E"/>
-        </a:solidFill>
+        <a:solidFill>val="004A38"/&gt;</a:solidFill>
         <a:effectLst/>
       </p:bgPr>
     </p:bg>
@@ -6571,9 +6756,7 @@
           <a:prstGeom prst="rect">
             <a:avLst/>
           </a:prstGeom>
-          <a:solidFill>
-            <a:srgbClr val="146B4A"/>
-          </a:solidFill>
+          <a:solidFill>val="007A55"/&gt;</a:solidFill>
           <a:ln>
             <a:noFill/>
           </a:ln>
@@ -6615,9 +6798,7 @@
           <a:prstGeom prst="rect">
             <a:avLst/>
           </a:prstGeom>
-          <a:solidFill>
-            <a:srgbClr val="FFD700"/>
-          </a:solidFill>
+          <a:solidFill>val="F0B429"/&gt;</a:solidFill>
           <a:ln>
             <a:noFill/>
           </a:ln>
@@ -6659,9 +6840,7 @@
           <a:prstGeom prst="rect">
             <a:avLst/>
           </a:prstGeom>
-          <a:solidFill>
-            <a:srgbClr val="FFD700"/>
-          </a:solidFill>
+          <a:solidFill>val="F0B429"/&gt;</a:solidFill>
           <a:ln>
             <a:noFill/>
           </a:ln>
@@ -6703,9 +6882,7 @@
           <a:prstGeom prst="rect">
             <a:avLst/>
           </a:prstGeom>
-          <a:solidFill>
-            <a:srgbClr val="146B4A"/>
-          </a:solidFill>
+          <a:solidFill>val="007A55"/&gt;</a:solidFill>
           <a:ln>
             <a:noFill/>
           </a:ln>
@@ -6758,10 +6935,8 @@
             <a:pPr algn="l"/>
             <a:r>
               <a:rPr sz="2600" b="1" i="0">
-                <a:solidFill>
-                  <a:srgbClr val="FFD700"/>
-                </a:solidFill>
-                <a:latin typeface="Calibri"/>
+                <a:solidFill>val="F0B429"/&gt;</a:solidFill>
+                <a:latin typeface="Poppins"/>
               </a:rPr>
               <a:t>Self-Assessment (MCQ)</a:t>
             </a:r>
@@ -6782,9 +6957,7 @@
           <a:prstGeom prst="rect">
             <a:avLst/>
           </a:prstGeom>
-          <a:solidFill>
-            <a:srgbClr val="146B4A"/>
-          </a:solidFill>
+          <a:solidFill>val="007A55"/&gt;</a:solidFill>
           <a:ln>
             <a:noFill/>
           </a:ln>
@@ -6841,10 +7014,8 @@
             </a:pPr>
             <a:r>
               <a:rPr sz="1500" b="1">
-                <a:solidFill>
-                  <a:srgbClr val="FFFFFF"/>
-                </a:solidFill>
-                <a:latin typeface="Calibri"/>
+                <a:solidFill>val="FFFFFF"/&gt;</a:solidFill>
+                <a:latin typeface="Poppins"/>
               </a:rPr>
               <a:t>1. Which key starts the slideshow from the beginning?</a:t>
             </a:r>
@@ -6857,10 +7028,8 @@
             </a:pPr>
             <a:r>
               <a:rPr sz="1400">
-                <a:solidFill>
-                  <a:srgbClr val="BBBBBB"/>
-                </a:solidFill>
-                <a:latin typeface="Calibri"/>
+                <a:solidFill>val="9AA7B6"/&gt;</a:solidFill>
+                <a:latin typeface="Poppins"/>
               </a:rPr>
               <a:t>      a) F2</a:t>
             </a:r>
@@ -6873,10 +7042,8 @@
             </a:pPr>
             <a:r>
               <a:rPr sz="1400">
-                <a:solidFill>
-                  <a:srgbClr val="BBBBBB"/>
-                </a:solidFill>
-                <a:latin typeface="Calibri"/>
+                <a:solidFill>val="9AA7B6"/&gt;</a:solidFill>
+                <a:latin typeface="Poppins"/>
               </a:rPr>
               <a:t>      b) F5</a:t>
             </a:r>
@@ -6889,10 +7056,8 @@
             </a:pPr>
             <a:r>
               <a:rPr sz="1400">
-                <a:solidFill>
-                  <a:srgbClr val="BBBBBB"/>
-                </a:solidFill>
-                <a:latin typeface="Calibri"/>
+                <a:solidFill>val="9AA7B6"/&gt;</a:solidFill>
+                <a:latin typeface="Poppins"/>
               </a:rPr>
               <a:t>      c) F9</a:t>
             </a:r>
@@ -6905,10 +7070,8 @@
             </a:pPr>
             <a:r>
               <a:rPr sz="1500" b="1">
-                <a:solidFill>
-                  <a:srgbClr val="FFFFFF"/>
-                </a:solidFill>
-                <a:latin typeface="Calibri"/>
+                <a:solidFill>val="FFFFFF"/&gt;</a:solidFill>
+                <a:latin typeface="Poppins"/>
               </a:rPr>
               <a:t>2. A transition applies:</a:t>
             </a:r>
@@ -6921,10 +7084,8 @@
             </a:pPr>
             <a:r>
               <a:rPr sz="1400">
-                <a:solidFill>
-                  <a:srgbClr val="BBBBBB"/>
-                </a:solidFill>
-                <a:latin typeface="Calibri"/>
+                <a:solidFill>val="9AA7B6"/&gt;</a:solidFill>
+                <a:latin typeface="Poppins"/>
               </a:rPr>
               <a:t>      a) To objects on one slide</a:t>
             </a:r>
@@ -6937,10 +7098,8 @@
             </a:pPr>
             <a:r>
               <a:rPr sz="1400">
-                <a:solidFill>
-                  <a:srgbClr val="BBBBBB"/>
-                </a:solidFill>
-                <a:latin typeface="Calibri"/>
+                <a:solidFill>val="9AA7B6"/&gt;</a:solidFill>
+                <a:latin typeface="Poppins"/>
               </a:rPr>
               <a:t>      b) Between two slides</a:t>
             </a:r>
@@ -6953,10 +7112,8 @@
             </a:pPr>
             <a:r>
               <a:rPr sz="1400">
-                <a:solidFill>
-                  <a:srgbClr val="BBBBBB"/>
-                </a:solidFill>
-                <a:latin typeface="Calibri"/>
+                <a:solidFill>val="9AA7B6"/&gt;</a:solidFill>
+                <a:latin typeface="Poppins"/>
               </a:rPr>
               <a:t>      c) To the whole file</a:t>
             </a:r>
@@ -6969,10 +7126,8 @@
             </a:pPr>
             <a:r>
               <a:rPr sz="1500" b="1">
-                <a:solidFill>
-                  <a:srgbClr val="FFFFFF"/>
-                </a:solidFill>
-                <a:latin typeface="Calibri"/>
+                <a:solidFill>val="FFFFFF"/&gt;</a:solidFill>
+                <a:latin typeface="Poppins"/>
               </a:rPr>
               <a:t>3. Presenter view lets you:</a:t>
             </a:r>
@@ -6985,10 +7140,8 @@
             </a:pPr>
             <a:r>
               <a:rPr sz="1400">
-                <a:solidFill>
-                  <a:srgbClr val="BBBBBB"/>
-                </a:solidFill>
-                <a:latin typeface="Calibri"/>
+                <a:solidFill>val="9AA7B6"/&gt;</a:solidFill>
+                <a:latin typeface="Poppins"/>
               </a:rPr>
               <a:t>      a) See your notes</a:t>
             </a:r>
@@ -7001,10 +7154,8 @@
             </a:pPr>
             <a:r>
               <a:rPr sz="1400">
-                <a:solidFill>
-                  <a:srgbClr val="BBBBBB"/>
-                </a:solidFill>
-                <a:latin typeface="Calibri"/>
+                <a:solidFill>val="9AA7B6"/&gt;</a:solidFill>
+                <a:latin typeface="Poppins"/>
               </a:rPr>
               <a:t>      b) Use a timer</a:t>
             </a:r>
@@ -7017,10 +7168,8 @@
             </a:pPr>
             <a:r>
               <a:rPr sz="1400">
-                <a:solidFill>
-                  <a:srgbClr val="BBBBBB"/>
-                </a:solidFill>
-                <a:latin typeface="Calibri"/>
+                <a:solidFill>val="9AA7B6"/&gt;</a:solidFill>
+                <a:latin typeface="Poppins"/>
               </a:rPr>
               <a:t>      c) Both</a:t>
             </a:r>
@@ -7051,6 +7200,47 @@
           </a:prstGeom>
         </p:spPr>
       </p:pic>
+      <p:sp>
+        <p:nvSpPr>
+          <p:cNvPr id="990001" name="Pied de page FLE"/>
+          <p:cNvSpPr>
+            <a:spLocks noGrp="1"/>
+          </p:cNvSpPr>
+          <p:nvPr/>
+        </p:nvSpPr>
+        <p:spPr>
+          <a:xfrm>
+            <a:off x="4343400" y="-329184"/>
+            <a:ext cx="4572000" cy="274320"/>
+          </a:xfrm>
+          <a:prstGeom prst="rect">
+            <a:avLst/>
+          </a:prstGeom>
+        </p:spPr>
+        <p:txBody>
+          <a:bodyPr anchor="b"/>
+          <a:lstStyle/>
+          <a:p>
+            <a:pPr algn="r">
+              <a:defRPr sz="900">
+                <a:solidFill>
+                  <a:srgbClr val="9AA7B6"/>
+                </a:solidFill>
+                <a:latin typeface="Poppins"/>
+              </a:defRPr>
+            </a:pPr>
+            <a:r>
+              <a:rPr lang="fr-FR" sz="900">
+                <a:solidFill>
+                  <a:srgbClr val="9AA7B6"/>
+                </a:solidFill>
+                <a:latin typeface="Poppins"/>
+              </a:rPr>
+              <a:t>Université de Mostaganem — Dr. Madani BELACEL</a:t>
+            </a:r>
+          </a:p>
+        </p:txBody>
+      </p:sp>
     </p:spTree>
   </p:cSld>
   <p:clrMapOvr>
@@ -7064,9 +7254,7 @@
   <p:cSld>
     <p:bg>
       <p:bgPr>
-        <a:solidFill>
-          <a:srgbClr val="0B3D2E"/>
-        </a:solidFill>
+        <a:solidFill>val="004A38"/&gt;</a:solidFill>
         <a:effectLst/>
       </p:bgPr>
     </p:bg>
@@ -7091,9 +7279,7 @@
           <a:prstGeom prst="rect">
             <a:avLst/>
           </a:prstGeom>
-          <a:solidFill>
-            <a:srgbClr val="146B4A"/>
-          </a:solidFill>
+          <a:solidFill>val="007A55"/&gt;</a:solidFill>
           <a:ln>
             <a:noFill/>
           </a:ln>
@@ -7135,9 +7321,7 @@
           <a:prstGeom prst="rect">
             <a:avLst/>
           </a:prstGeom>
-          <a:solidFill>
-            <a:srgbClr val="FFD700"/>
-          </a:solidFill>
+          <a:solidFill>val="F0B429"/&gt;</a:solidFill>
           <a:ln>
             <a:noFill/>
           </a:ln>
@@ -7179,9 +7363,7 @@
           <a:prstGeom prst="rect">
             <a:avLst/>
           </a:prstGeom>
-          <a:solidFill>
-            <a:srgbClr val="FFD700"/>
-          </a:solidFill>
+          <a:solidFill>val="F0B429"/&gt;</a:solidFill>
           <a:ln>
             <a:noFill/>
           </a:ln>
@@ -7223,9 +7405,7 @@
           <a:prstGeom prst="rect">
             <a:avLst/>
           </a:prstGeom>
-          <a:solidFill>
-            <a:srgbClr val="146B4A"/>
-          </a:solidFill>
+          <a:solidFill>val="007A55"/&gt;</a:solidFill>
           <a:ln>
             <a:noFill/>
           </a:ln>
@@ -7278,10 +7458,8 @@
             <a:pPr algn="ctr"/>
             <a:r>
               <a:rPr sz="3000" b="1" i="0">
-                <a:solidFill>
-                  <a:srgbClr val="FFD700"/>
-                </a:solidFill>
-                <a:latin typeface="Calibri"/>
+                <a:solidFill>val="F0B429"/&gt;</a:solidFill>
+                <a:latin typeface="Poppins"/>
               </a:rPr>
               <a:t>Conclusion</a:t>
             </a:r>
@@ -7302,9 +7480,7 @@
           <a:prstGeom prst="rect">
             <a:avLst/>
           </a:prstGeom>
-          <a:solidFill>
-            <a:srgbClr val="146B4A"/>
-          </a:solidFill>
+          <a:solidFill>val="007A55"/&gt;</a:solidFill>
           <a:ln>
             <a:noFill/>
           </a:ln>
@@ -7361,10 +7537,8 @@
             </a:pPr>
             <a:r>
               <a:rPr sz="1800">
-                <a:solidFill>
-                  <a:srgbClr val="FFFFFF"/>
-                </a:solidFill>
-                <a:latin typeface="Calibri"/>
+                <a:solidFill>val="FFFFFF"/&gt;</a:solidFill>
+                <a:latin typeface="Poppins"/>
               </a:rPr>
               <a:t>▪  PowerPoint turns ideas into striking visual aids.</a:t>
             </a:r>
@@ -7377,10 +7551,8 @@
             </a:pPr>
             <a:r>
               <a:rPr sz="1800">
-                <a:solidFill>
-                  <a:srgbClr val="FFFFFF"/>
-                </a:solidFill>
-                <a:latin typeface="Calibri"/>
+                <a:solidFill>val="FFFFFF"/&gt;</a:solidFill>
+                <a:latin typeface="Poppins"/>
               </a:rPr>
               <a:t>▪  Simplicity, structure and readability make quality slides.</a:t>
             </a:r>
@@ -7393,10 +7565,8 @@
             </a:pPr>
             <a:r>
               <a:rPr sz="1800">
-                <a:solidFill>
-                  <a:srgbClr val="FFFFFF"/>
-                </a:solidFill>
-                <a:latin typeface="Calibri"/>
+                <a:solidFill>val="FFFFFF"/&gt;</a:solidFill>
+                <a:latin typeface="Poppins"/>
               </a:rPr>
               <a:t>▪  Animations must serve the message, not distract from it.</a:t>
             </a:r>
@@ -7409,10 +7579,8 @@
             </a:pPr>
             <a:r>
               <a:rPr sz="1800">
-                <a:solidFill>
-                  <a:srgbClr val="FFFFFF"/>
-                </a:solidFill>
-                <a:latin typeface="Calibri"/>
+                <a:solidFill>val="FFFFFF"/&gt;</a:solidFill>
+                <a:latin typeface="Poppins"/>
               </a:rPr>
               <a:t>▪  Next course: Internet basics.</a:t>
             </a:r>
@@ -7443,6 +7611,47 @@
           </a:prstGeom>
         </p:spPr>
       </p:pic>
+      <p:sp>
+        <p:nvSpPr>
+          <p:cNvPr id="990001" name="Pied de page FLE"/>
+          <p:cNvSpPr>
+            <a:spLocks noGrp="1"/>
+          </p:cNvSpPr>
+          <p:nvPr/>
+        </p:nvSpPr>
+        <p:spPr>
+          <a:xfrm>
+            <a:off x="4343400" y="-329184"/>
+            <a:ext cx="4572000" cy="274320"/>
+          </a:xfrm>
+          <a:prstGeom prst="rect">
+            <a:avLst/>
+          </a:prstGeom>
+        </p:spPr>
+        <p:txBody>
+          <a:bodyPr anchor="b"/>
+          <a:lstStyle/>
+          <a:p>
+            <a:pPr algn="r">
+              <a:defRPr sz="900">
+                <a:solidFill>
+                  <a:srgbClr val="9AA7B6"/>
+                </a:solidFill>
+                <a:latin typeface="Poppins"/>
+              </a:defRPr>
+            </a:pPr>
+            <a:r>
+              <a:rPr lang="fr-FR" sz="900">
+                <a:solidFill>
+                  <a:srgbClr val="9AA7B6"/>
+                </a:solidFill>
+                <a:latin typeface="Poppins"/>
+              </a:rPr>
+              <a:t>Université de Mostaganem — Dr. Madani BELACEL</a:t>
+            </a:r>
+          </a:p>
+        </p:txBody>
+      </p:sp>
     </p:spTree>
   </p:cSld>
   <p:clrMapOvr>
@@ -7456,9 +7665,7 @@
   <p:cSld>
     <p:bg>
       <p:bgPr>
-        <a:solidFill>
-          <a:srgbClr val="0B3D2E"/>
-        </a:solidFill>
+        <a:solidFill>val="004A38"/&gt;</a:solidFill>
         <a:effectLst/>
       </p:bgPr>
     </p:bg>
@@ -7483,9 +7690,7 @@
           <a:prstGeom prst="rect">
             <a:avLst/>
           </a:prstGeom>
-          <a:solidFill>
-            <a:srgbClr val="146B4A"/>
-          </a:solidFill>
+          <a:solidFill>val="007A55"/&gt;</a:solidFill>
           <a:ln>
             <a:noFill/>
           </a:ln>
@@ -7527,9 +7732,7 @@
           <a:prstGeom prst="rect">
             <a:avLst/>
           </a:prstGeom>
-          <a:solidFill>
-            <a:srgbClr val="FFD700"/>
-          </a:solidFill>
+          <a:solidFill>val="F0B429"/&gt;</a:solidFill>
           <a:ln>
             <a:noFill/>
           </a:ln>
@@ -7571,9 +7774,7 @@
           <a:prstGeom prst="rect">
             <a:avLst/>
           </a:prstGeom>
-          <a:solidFill>
-            <a:srgbClr val="FFD700"/>
-          </a:solidFill>
+          <a:solidFill>val="F0B429"/&gt;</a:solidFill>
           <a:ln>
             <a:noFill/>
           </a:ln>
@@ -7615,9 +7816,7 @@
           <a:prstGeom prst="rect">
             <a:avLst/>
           </a:prstGeom>
-          <a:solidFill>
-            <a:srgbClr val="146B4A"/>
-          </a:solidFill>
+          <a:solidFill>val="007A55"/&gt;</a:solidFill>
           <a:ln>
             <a:noFill/>
           </a:ln>
@@ -7670,10 +7869,8 @@
             <a:pPr algn="ctr"/>
             <a:r>
               <a:rPr sz="3200" b="1" i="0">
-                <a:solidFill>
-                  <a:srgbClr val="FFD700"/>
-                </a:solidFill>
-                <a:latin typeface="Calibri"/>
+                <a:solidFill>val="F0B429"/&gt;</a:solidFill>
+                <a:latin typeface="Poppins"/>
               </a:rPr>
               <a:t>Course Outline</a:t>
             </a:r>
@@ -7709,10 +7906,8 @@
             </a:pPr>
             <a:r>
               <a:rPr sz="1900">
-                <a:solidFill>
-                  <a:srgbClr val="FFFFFF"/>
-                </a:solidFill>
-                <a:latin typeface="Calibri"/>
+                <a:solidFill>val="FFFFFF"/&gt;</a:solidFill>
+                <a:latin typeface="Poppins"/>
               </a:rPr>
               <a:t>▪  1. What Is a Presentation?</a:t>
             </a:r>
@@ -7725,10 +7920,8 @@
             </a:pPr>
             <a:r>
               <a:rPr sz="1900">
-                <a:solidFill>
-                  <a:srgbClr val="FFFFFF"/>
-                </a:solidFill>
-                <a:latin typeface="Calibri"/>
+                <a:solidFill>val="FFFFFF"/&gt;</a:solidFill>
+                <a:latin typeface="Poppins"/>
               </a:rPr>
               <a:t>▪  2. Creating and Organizing Slides</a:t>
             </a:r>
@@ -7741,10 +7934,8 @@
             </a:pPr>
             <a:r>
               <a:rPr sz="1900">
-                <a:solidFill>
-                  <a:srgbClr val="FFFFFF"/>
-                </a:solidFill>
-                <a:latin typeface="Calibri"/>
+                <a:solidFill>val="FFFFFF"/&gt;</a:solidFill>
+                <a:latin typeface="Poppins"/>
               </a:rPr>
               <a:t>▪  3. Text and Multimedia Objects</a:t>
             </a:r>
@@ -7757,10 +7948,8 @@
             </a:pPr>
             <a:r>
               <a:rPr sz="1900">
-                <a:solidFill>
-                  <a:srgbClr val="FFFFFF"/>
-                </a:solidFill>
-                <a:latin typeface="Calibri"/>
+                <a:solidFill>val="FFFFFF"/&gt;</a:solidFill>
+                <a:latin typeface="Poppins"/>
               </a:rPr>
               <a:t>▪  4. Animations and Transitions</a:t>
             </a:r>
@@ -7773,10 +7962,8 @@
             </a:pPr>
             <a:r>
               <a:rPr sz="1900">
-                <a:solidFill>
-                  <a:srgbClr val="FFFFFF"/>
-                </a:solidFill>
-                <a:latin typeface="Calibri"/>
+                <a:solidFill>val="FFFFFF"/&gt;</a:solidFill>
+                <a:latin typeface="Poppins"/>
               </a:rPr>
               <a:t>▪  5. Slideshow Mode</a:t>
             </a:r>
@@ -7789,10 +7976,8 @@
             </a:pPr>
             <a:r>
               <a:rPr sz="1900">
-                <a:solidFill>
-                  <a:srgbClr val="FFFFFF"/>
-                </a:solidFill>
-                <a:latin typeface="Calibri"/>
+                <a:solidFill>val="FFFFFF"/&gt;</a:solidFill>
+                <a:latin typeface="Poppins"/>
               </a:rPr>
               <a:t>▪  6. Designing Good Slides</a:t>
             </a:r>
@@ -7805,12 +7990,51 @@
             </a:pPr>
             <a:r>
               <a:rPr sz="1900">
-                <a:solidFill>
-                  <a:srgbClr val="FFFFFF"/>
-                </a:solidFill>
-                <a:latin typeface="Calibri"/>
+                <a:solidFill>val="FFFFFF"/&gt;</a:solidFill>
+                <a:latin typeface="Poppins"/>
               </a:rPr>
               <a:t>▪  7. Sharing and Distributing</a:t>
+            </a:r>
+          </a:p>
+        </p:txBody>
+      </p:sp>
+      <p:sp>
+        <p:nvSpPr>
+          <p:cNvPr id="990001" name="Pied de page FLE"/>
+          <p:cNvSpPr>
+            <a:spLocks noGrp="1"/>
+          </p:cNvSpPr>
+          <p:nvPr/>
+        </p:nvSpPr>
+        <p:spPr>
+          <a:xfrm>
+            <a:off x="4343400" y="-329184"/>
+            <a:ext cx="4572000" cy="274320"/>
+          </a:xfrm>
+          <a:prstGeom prst="rect">
+            <a:avLst/>
+          </a:prstGeom>
+        </p:spPr>
+        <p:txBody>
+          <a:bodyPr anchor="b"/>
+          <a:lstStyle/>
+          <a:p>
+            <a:pPr algn="r">
+              <a:defRPr sz="900">
+                <a:solidFill>
+                  <a:srgbClr val="9AA7B6"/>
+                </a:solidFill>
+                <a:latin typeface="Poppins"/>
+              </a:defRPr>
+            </a:pPr>
+            <a:r>
+              <a:rPr lang="fr-FR" sz="900">
+                <a:solidFill>
+                  <a:srgbClr val="9AA7B6"/>
+                </a:solidFill>
+                <a:latin typeface="Poppins"/>
+              </a:rPr>
+              <a:t>Université de Mostaganem — Dr. Madani BELACEL</a:t>
             </a:r>
           </a:p>
         </p:txBody>
@@ -7828,9 +8052,7 @@
   <p:cSld>
     <p:bg>
       <p:bgPr>
-        <a:solidFill>
-          <a:srgbClr val="0B3D2E"/>
-        </a:solidFill>
+        <a:solidFill>val="004A38"/&gt;</a:solidFill>
         <a:effectLst/>
       </p:bgPr>
     </p:bg>
@@ -7855,9 +8077,7 @@
           <a:prstGeom prst="rect">
             <a:avLst/>
           </a:prstGeom>
-          <a:solidFill>
-            <a:srgbClr val="146B4A"/>
-          </a:solidFill>
+          <a:solidFill>val="007A55"/&gt;</a:solidFill>
           <a:ln>
             <a:noFill/>
           </a:ln>
@@ -7899,9 +8119,7 @@
           <a:prstGeom prst="rect">
             <a:avLst/>
           </a:prstGeom>
-          <a:solidFill>
-            <a:srgbClr val="FFD700"/>
-          </a:solidFill>
+          <a:solidFill>val="F0B429"/&gt;</a:solidFill>
           <a:ln>
             <a:noFill/>
           </a:ln>
@@ -7943,9 +8161,7 @@
           <a:prstGeom prst="rect">
             <a:avLst/>
           </a:prstGeom>
-          <a:solidFill>
-            <a:srgbClr val="FFD700"/>
-          </a:solidFill>
+          <a:solidFill>val="F0B429"/&gt;</a:solidFill>
           <a:ln>
             <a:noFill/>
           </a:ln>
@@ -7987,9 +8203,7 @@
           <a:prstGeom prst="rect">
             <a:avLst/>
           </a:prstGeom>
-          <a:solidFill>
-            <a:srgbClr val="146B4A"/>
-          </a:solidFill>
+          <a:solidFill>val="007A55"/&gt;</a:solidFill>
           <a:ln>
             <a:noFill/>
           </a:ln>
@@ -8042,10 +8256,8 @@
             <a:pPr algn="l"/>
             <a:r>
               <a:rPr sz="3000" b="1" i="0">
-                <a:solidFill>
-                  <a:srgbClr val="FFD700"/>
-                </a:solidFill>
-                <a:latin typeface="Calibri"/>
+                <a:solidFill>val="F0B429"/&gt;</a:solidFill>
+                <a:latin typeface="Poppins"/>
               </a:rPr>
               <a:t>References</a:t>
             </a:r>
@@ -8066,9 +8278,7 @@
           <a:prstGeom prst="rect">
             <a:avLst/>
           </a:prstGeom>
-          <a:solidFill>
-            <a:srgbClr val="146B4A"/>
-          </a:solidFill>
+          <a:solidFill>val="007A55"/&gt;</a:solidFill>
           <a:ln>
             <a:noFill/>
           </a:ln>
@@ -8125,10 +8335,8 @@
             </a:pPr>
             <a:r>
               <a:rPr sz="1500">
-                <a:solidFill>
-                  <a:srgbClr val="BBBBBB"/>
-                </a:solidFill>
-                <a:latin typeface="Calibri"/>
+                <a:solidFill>val="9AA7B6"/&gt;</a:solidFill>
+                <a:latin typeface="Poppins"/>
               </a:rPr>
               <a:t>- Microsoft Support - PowerPoint Guide.</a:t>
             </a:r>
@@ -8141,10 +8349,8 @@
             </a:pPr>
             <a:r>
               <a:rPr sz="1500">
-                <a:solidFill>
-                  <a:srgbClr val="BBBBBB"/>
-                </a:solidFill>
-                <a:latin typeface="Calibri"/>
+                <a:solidFill>val="9AA7B6"/&gt;</a:solidFill>
+                <a:latin typeface="Poppins"/>
               </a:rPr>
               <a:t>- G. Reynolds, "Presentation Zen", Peachpit Press.</a:t>
             </a:r>
@@ -8157,10 +8363,8 @@
             </a:pPr>
             <a:r>
               <a:rPr sz="1500">
-                <a:solidFill>
-                  <a:srgbClr val="BBBBBB"/>
-                </a:solidFill>
-                <a:latin typeface="Calibri"/>
+                <a:solidFill>val="9AA7B6"/&gt;</a:solidFill>
+                <a:latin typeface="Poppins"/>
               </a:rPr>
               <a:t>- ICT Course materials, University of Mostaganem.</a:t>
             </a:r>
@@ -8173,10 +8377,8 @@
             </a:pPr>
             <a:r>
               <a:rPr sz="1500">
-                <a:solidFill>
-                  <a:srgbClr val="BBBBBB"/>
-                </a:solidFill>
-                <a:latin typeface="Calibri"/>
+                <a:solidFill>val="9AA7B6"/&gt;</a:solidFill>
+                <a:latin typeface="Poppins"/>
               </a:rPr>
               <a:t>- Presentation community resources.</a:t>
             </a:r>
@@ -8207,6 +8409,47 @@
           </a:prstGeom>
         </p:spPr>
       </p:pic>
+      <p:sp>
+        <p:nvSpPr>
+          <p:cNvPr id="990001" name="Pied de page FLE"/>
+          <p:cNvSpPr>
+            <a:spLocks noGrp="1"/>
+          </p:cNvSpPr>
+          <p:nvPr/>
+        </p:nvSpPr>
+        <p:spPr>
+          <a:xfrm>
+            <a:off x="4343400" y="-329184"/>
+            <a:ext cx="4572000" cy="274320"/>
+          </a:xfrm>
+          <a:prstGeom prst="rect">
+            <a:avLst/>
+          </a:prstGeom>
+        </p:spPr>
+        <p:txBody>
+          <a:bodyPr anchor="b"/>
+          <a:lstStyle/>
+          <a:p>
+            <a:pPr algn="r">
+              <a:defRPr sz="900">
+                <a:solidFill>
+                  <a:srgbClr val="9AA7B6"/>
+                </a:solidFill>
+                <a:latin typeface="Poppins"/>
+              </a:defRPr>
+            </a:pPr>
+            <a:r>
+              <a:rPr lang="fr-FR" sz="900">
+                <a:solidFill>
+                  <a:srgbClr val="9AA7B6"/>
+                </a:solidFill>
+                <a:latin typeface="Poppins"/>
+              </a:rPr>
+              <a:t>Université de Mostaganem — Dr. Madani BELACEL</a:t>
+            </a:r>
+          </a:p>
+        </p:txBody>
+      </p:sp>
     </p:spTree>
   </p:cSld>
   <p:clrMapOvr>
@@ -8220,9 +8463,7 @@
   <p:cSld>
     <p:bg>
       <p:bgPr>
-        <a:solidFill>
-          <a:srgbClr val="0B3D2E"/>
-        </a:solidFill>
+        <a:solidFill>val="004A38"/&gt;</a:solidFill>
         <a:effectLst/>
       </p:bgPr>
     </p:bg>
@@ -8247,9 +8488,7 @@
           <a:prstGeom prst="rect">
             <a:avLst/>
           </a:prstGeom>
-          <a:solidFill>
-            <a:srgbClr val="146B4A"/>
-          </a:solidFill>
+          <a:solidFill>val="007A55"/&gt;</a:solidFill>
           <a:ln>
             <a:noFill/>
           </a:ln>
@@ -8291,9 +8530,7 @@
           <a:prstGeom prst="rect">
             <a:avLst/>
           </a:prstGeom>
-          <a:solidFill>
-            <a:srgbClr val="FFD700"/>
-          </a:solidFill>
+          <a:solidFill>val="F0B429"/&gt;</a:solidFill>
           <a:ln>
             <a:noFill/>
           </a:ln>
@@ -8335,9 +8572,7 @@
           <a:prstGeom prst="rect">
             <a:avLst/>
           </a:prstGeom>
-          <a:solidFill>
-            <a:srgbClr val="FFD700"/>
-          </a:solidFill>
+          <a:solidFill>val="F0B429"/&gt;</a:solidFill>
           <a:ln>
             <a:noFill/>
           </a:ln>
@@ -8379,9 +8614,7 @@
           <a:prstGeom prst="rect">
             <a:avLst/>
           </a:prstGeom>
-          <a:solidFill>
-            <a:srgbClr val="146B4A"/>
-          </a:solidFill>
+          <a:solidFill>val="007A55"/&gt;</a:solidFill>
           <a:ln>
             <a:noFill/>
           </a:ln>
@@ -8423,9 +8656,7 @@
           <a:prstGeom prst="rect">
             <a:avLst/>
           </a:prstGeom>
-          <a:solidFill>
-            <a:srgbClr val="FFD700"/>
-          </a:solidFill>
+          <a:solidFill>val="F0B429"/&gt;</a:solidFill>
           <a:ln>
             <a:noFill/>
           </a:ln>
@@ -8478,10 +8709,8 @@
             <a:pPr algn="ctr"/>
             <a:r>
               <a:rPr sz="3800" b="1" i="0">
-                <a:solidFill>
-                  <a:srgbClr val="FFD700"/>
-                </a:solidFill>
-                <a:latin typeface="Calibri"/>
+                <a:solidFill>val="F0B429"/&gt;</a:solidFill>
+                <a:latin typeface="Poppins"/>
               </a:rPr>
               <a:t>Thank you for your attention!</a:t>
             </a:r>
@@ -8513,10 +8742,8 @@
             <a:pPr algn="ctr"/>
             <a:r>
               <a:rPr sz="2600" b="0" i="0">
-                <a:solidFill>
-                  <a:srgbClr val="FFFFFF"/>
-                </a:solidFill>
-                <a:latin typeface="Calibri"/>
+                <a:solidFill>val="FFFFFF"/&gt;</a:solidFill>
+                <a:latin typeface="Poppins"/>
               </a:rPr>
               <a:t>Questions?</a:t>
             </a:r>
@@ -8548,10 +8775,8 @@
             <a:pPr algn="ctr"/>
             <a:r>
               <a:rPr sz="1600" b="0" i="0">
-                <a:solidFill>
-                  <a:srgbClr val="BBBBBB"/>
-                </a:solidFill>
-                <a:latin typeface="Calibri"/>
+                <a:solidFill>val="9AA7B6"/&gt;</a:solidFill>
+                <a:latin typeface="Poppins"/>
               </a:rPr>
               <a:t>Dr. BELACEL Madani</a:t>
             </a:r>
@@ -8582,6 +8807,47 @@
           </a:prstGeom>
         </p:spPr>
       </p:pic>
+      <p:sp>
+        <p:nvSpPr>
+          <p:cNvPr id="990001" name="Pied de page FLE"/>
+          <p:cNvSpPr>
+            <a:spLocks noGrp="1"/>
+          </p:cNvSpPr>
+          <p:nvPr/>
+        </p:nvSpPr>
+        <p:spPr>
+          <a:xfrm>
+            <a:off x="4343400" y="-329184"/>
+            <a:ext cx="4572000" cy="274320"/>
+          </a:xfrm>
+          <a:prstGeom prst="rect">
+            <a:avLst/>
+          </a:prstGeom>
+        </p:spPr>
+        <p:txBody>
+          <a:bodyPr anchor="b"/>
+          <a:lstStyle/>
+          <a:p>
+            <a:pPr algn="r">
+              <a:defRPr sz="900">
+                <a:solidFill>
+                  <a:srgbClr val="9AA7B6"/>
+                </a:solidFill>
+                <a:latin typeface="Poppins"/>
+              </a:defRPr>
+            </a:pPr>
+            <a:r>
+              <a:rPr lang="fr-FR" sz="900">
+                <a:solidFill>
+                  <a:srgbClr val="9AA7B6"/>
+                </a:solidFill>
+                <a:latin typeface="Poppins"/>
+              </a:rPr>
+              <a:t>Université de Mostaganem — Dr. Madani BELACEL</a:t>
+            </a:r>
+          </a:p>
+        </p:txBody>
+      </p:sp>
     </p:spTree>
   </p:cSld>
   <p:clrMapOvr>
@@ -8595,9 +8861,7 @@
   <p:cSld>
     <p:bg>
       <p:bgPr>
-        <a:solidFill>
-          <a:srgbClr val="0B3D2E"/>
-        </a:solidFill>
+        <a:solidFill>val="004A38"/&gt;</a:solidFill>
         <a:effectLst/>
       </p:bgPr>
     </p:bg>
@@ -8622,9 +8886,7 @@
           <a:prstGeom prst="rect">
             <a:avLst/>
           </a:prstGeom>
-          <a:solidFill>
-            <a:srgbClr val="146B4A"/>
-          </a:solidFill>
+          <a:solidFill>val="007A55"/&gt;</a:solidFill>
           <a:ln>
             <a:noFill/>
           </a:ln>
@@ -8666,9 +8928,7 @@
           <a:prstGeom prst="rect">
             <a:avLst/>
           </a:prstGeom>
-          <a:solidFill>
-            <a:srgbClr val="FFD700"/>
-          </a:solidFill>
+          <a:solidFill>val="F0B429"/&gt;</a:solidFill>
           <a:ln>
             <a:noFill/>
           </a:ln>
@@ -8710,9 +8970,7 @@
           <a:prstGeom prst="rect">
             <a:avLst/>
           </a:prstGeom>
-          <a:solidFill>
-            <a:srgbClr val="FFD700"/>
-          </a:solidFill>
+          <a:solidFill>val="F0B429"/&gt;</a:solidFill>
           <a:ln>
             <a:noFill/>
           </a:ln>
@@ -8754,9 +9012,7 @@
           <a:prstGeom prst="rect">
             <a:avLst/>
           </a:prstGeom>
-          <a:solidFill>
-            <a:srgbClr val="146B4A"/>
-          </a:solidFill>
+          <a:solidFill>val="007A55"/&gt;</a:solidFill>
           <a:ln>
             <a:noFill/>
           </a:ln>
@@ -8798,9 +9054,7 @@
           <a:prstGeom prst="rect">
             <a:avLst/>
           </a:prstGeom>
-          <a:solidFill>
-            <a:srgbClr val="146B4A"/>
-          </a:solidFill>
+          <a:solidFill>val="007A55"/&gt;</a:solidFill>
           <a:ln>
             <a:noFill/>
           </a:ln>
@@ -8853,10 +9107,8 @@
             <a:pPr algn="ctr"/>
             <a:r>
               <a:rPr sz="2200" b="1" i="0">
-                <a:solidFill>
-                  <a:srgbClr val="BBBBBB"/>
-                </a:solidFill>
-                <a:latin typeface="Calibri"/>
+                <a:solidFill>val="9AA7B6"/&gt;</a:solidFill>
+                <a:latin typeface="Poppins"/>
               </a:rPr>
               <a:t>Section 1</a:t>
             </a:r>
@@ -8888,10 +9140,8 @@
             <a:pPr algn="ctr"/>
             <a:r>
               <a:rPr sz="2800" b="1" i="0">
-                <a:solidFill>
-                  <a:srgbClr val="FFD700"/>
-                </a:solidFill>
-                <a:latin typeface="Calibri"/>
+                <a:solidFill>val="F0B429"/&gt;</a:solidFill>
+                <a:latin typeface="Poppins"/>
               </a:rPr>
               <a:t>What Is a Presentation?</a:t>
             </a:r>
@@ -8922,6 +9172,47 @@
           </a:prstGeom>
         </p:spPr>
       </p:pic>
+      <p:sp>
+        <p:nvSpPr>
+          <p:cNvPr id="990001" name="Pied de page FLE"/>
+          <p:cNvSpPr>
+            <a:spLocks noGrp="1"/>
+          </p:cNvSpPr>
+          <p:nvPr/>
+        </p:nvSpPr>
+        <p:spPr>
+          <a:xfrm>
+            <a:off x="4343400" y="-329184"/>
+            <a:ext cx="4572000" cy="274320"/>
+          </a:xfrm>
+          <a:prstGeom prst="rect">
+            <a:avLst/>
+          </a:prstGeom>
+        </p:spPr>
+        <p:txBody>
+          <a:bodyPr anchor="b"/>
+          <a:lstStyle/>
+          <a:p>
+            <a:pPr algn="r">
+              <a:defRPr sz="900">
+                <a:solidFill>
+                  <a:srgbClr val="9AA7B6"/>
+                </a:solidFill>
+                <a:latin typeface="Poppins"/>
+              </a:defRPr>
+            </a:pPr>
+            <a:r>
+              <a:rPr lang="fr-FR" sz="900">
+                <a:solidFill>
+                  <a:srgbClr val="9AA7B6"/>
+                </a:solidFill>
+                <a:latin typeface="Poppins"/>
+              </a:rPr>
+              <a:t>Université de Mostaganem — Dr. Madani BELACEL</a:t>
+            </a:r>
+          </a:p>
+        </p:txBody>
+      </p:sp>
     </p:spTree>
   </p:cSld>
   <p:clrMapOvr>
@@ -8935,9 +9226,7 @@
   <p:cSld>
     <p:bg>
       <p:bgPr>
-        <a:solidFill>
-          <a:srgbClr val="0B3D2E"/>
-        </a:solidFill>
+        <a:solidFill>val="004A38"/&gt;</a:solidFill>
         <a:effectLst/>
       </p:bgPr>
     </p:bg>
@@ -8962,9 +9251,7 @@
           <a:prstGeom prst="rect">
             <a:avLst/>
           </a:prstGeom>
-          <a:solidFill>
-            <a:srgbClr val="146B4A"/>
-          </a:solidFill>
+          <a:solidFill>val="007A55"/&gt;</a:solidFill>
           <a:ln>
             <a:noFill/>
           </a:ln>
@@ -9006,9 +9293,7 @@
           <a:prstGeom prst="rect">
             <a:avLst/>
           </a:prstGeom>
-          <a:solidFill>
-            <a:srgbClr val="FFD700"/>
-          </a:solidFill>
+          <a:solidFill>val="F0B429"/&gt;</a:solidFill>
           <a:ln>
             <a:noFill/>
           </a:ln>
@@ -9050,9 +9335,7 @@
           <a:prstGeom prst="rect">
             <a:avLst/>
           </a:prstGeom>
-          <a:solidFill>
-            <a:srgbClr val="FFD700"/>
-          </a:solidFill>
+          <a:solidFill>val="F0B429"/&gt;</a:solidFill>
           <a:ln>
             <a:noFill/>
           </a:ln>
@@ -9094,9 +9377,7 @@
           <a:prstGeom prst="rect">
             <a:avLst/>
           </a:prstGeom>
-          <a:solidFill>
-            <a:srgbClr val="146B4A"/>
-          </a:solidFill>
+          <a:solidFill>val="007A55"/&gt;</a:solidFill>
           <a:ln>
             <a:noFill/>
           </a:ln>
@@ -9149,10 +9430,8 @@
             <a:pPr algn="l"/>
             <a:r>
               <a:rPr sz="2400" b="1" i="0">
-                <a:solidFill>
-                  <a:srgbClr val="FFD700"/>
-                </a:solidFill>
-                <a:latin typeface="Calibri"/>
+                <a:solidFill>val="F0B429"/&gt;</a:solidFill>
+                <a:latin typeface="Poppins"/>
               </a:rPr>
               <a:t>1 - What Is a Presentation?</a:t>
             </a:r>
@@ -9173,9 +9452,7 @@
           <a:prstGeom prst="rect">
             <a:avLst/>
           </a:prstGeom>
-          <a:solidFill>
-            <a:srgbClr val="146B4A"/>
-          </a:solidFill>
+          <a:solidFill>val="007A55"/&gt;</a:solidFill>
           <a:ln>
             <a:noFill/>
           </a:ln>
@@ -9232,10 +9509,8 @@
             </a:pPr>
             <a:r>
               <a:rPr sz="1800">
-                <a:solidFill>
-                  <a:srgbClr val="FFFFFF"/>
-                </a:solidFill>
-                <a:latin typeface="Calibri"/>
+                <a:solidFill>val="FFFFFF"/&gt;</a:solidFill>
+                <a:latin typeface="Poppins"/>
               </a:rPr>
               <a:t>▪  Software for creating animated slideshows.</a:t>
             </a:r>
@@ -9248,10 +9523,8 @@
             </a:pPr>
             <a:r>
               <a:rPr sz="1800">
-                <a:solidFill>
-                  <a:srgbClr val="FFFFFF"/>
-                </a:solidFill>
-                <a:latin typeface="Calibri"/>
+                <a:solidFill>val="FFFFFF"/&gt;</a:solidFill>
+                <a:latin typeface="Poppins"/>
               </a:rPr>
               <a:t>▪  Visual support for an oral presentation.</a:t>
             </a:r>
@@ -9264,10 +9537,8 @@
             </a:pPr>
             <a:r>
               <a:rPr sz="1800">
-                <a:solidFill>
-                  <a:srgbClr val="FFFFFF"/>
-                </a:solidFill>
-                <a:latin typeface="Calibri"/>
+                <a:solidFill>val="FFFFFF"/&gt;</a:solidFill>
+                <a:latin typeface="Poppins"/>
               </a:rPr>
               <a:t>▪  Slides combining text, images, sound and video.</a:t>
             </a:r>
@@ -9280,10 +9551,8 @@
             </a:pPr>
             <a:r>
               <a:rPr sz="1800">
-                <a:solidFill>
-                  <a:srgbClr val="FFFFFF"/>
-                </a:solidFill>
-                <a:latin typeface="Calibri"/>
+                <a:solidFill>val="FFFFFF"/&gt;</a:solidFill>
+                <a:latin typeface="Poppins"/>
               </a:rPr>
               <a:t>▪  Formats: .pptx, .ppsx (slideshow), PDF/video export.</a:t>
             </a:r>
@@ -9314,6 +9583,47 @@
           </a:prstGeom>
         </p:spPr>
       </p:pic>
+      <p:sp>
+        <p:nvSpPr>
+          <p:cNvPr id="990001" name="Pied de page FLE"/>
+          <p:cNvSpPr>
+            <a:spLocks noGrp="1"/>
+          </p:cNvSpPr>
+          <p:nvPr/>
+        </p:nvSpPr>
+        <p:spPr>
+          <a:xfrm>
+            <a:off x="4343400" y="-329184"/>
+            <a:ext cx="4572000" cy="274320"/>
+          </a:xfrm>
+          <a:prstGeom prst="rect">
+            <a:avLst/>
+          </a:prstGeom>
+        </p:spPr>
+        <p:txBody>
+          <a:bodyPr anchor="b"/>
+          <a:lstStyle/>
+          <a:p>
+            <a:pPr algn="r">
+              <a:defRPr sz="900">
+                <a:solidFill>
+                  <a:srgbClr val="9AA7B6"/>
+                </a:solidFill>
+                <a:latin typeface="Poppins"/>
+              </a:defRPr>
+            </a:pPr>
+            <a:r>
+              <a:rPr lang="fr-FR" sz="900">
+                <a:solidFill>
+                  <a:srgbClr val="9AA7B6"/>
+                </a:solidFill>
+                <a:latin typeface="Poppins"/>
+              </a:rPr>
+              <a:t>Université de Mostaganem — Dr. Madani BELACEL</a:t>
+            </a:r>
+          </a:p>
+        </p:txBody>
+      </p:sp>
     </p:spTree>
   </p:cSld>
   <p:clrMapOvr>
@@ -9327,9 +9637,7 @@
   <p:cSld>
     <p:bg>
       <p:bgPr>
-        <a:solidFill>
-          <a:srgbClr val="0B3D2E"/>
-        </a:solidFill>
+        <a:solidFill>val="004A38"/&gt;</a:solidFill>
         <a:effectLst/>
       </p:bgPr>
     </p:bg>
@@ -9354,9 +9662,7 @@
           <a:prstGeom prst="rect">
             <a:avLst/>
           </a:prstGeom>
-          <a:solidFill>
-            <a:srgbClr val="146B4A"/>
-          </a:solidFill>
+          <a:solidFill>val="007A55"/&gt;</a:solidFill>
           <a:ln>
             <a:noFill/>
           </a:ln>
@@ -9398,9 +9704,7 @@
           <a:prstGeom prst="rect">
             <a:avLst/>
           </a:prstGeom>
-          <a:solidFill>
-            <a:srgbClr val="FFD700"/>
-          </a:solidFill>
+          <a:solidFill>val="F0B429"/&gt;</a:solidFill>
           <a:ln>
             <a:noFill/>
           </a:ln>
@@ -9442,9 +9746,7 @@
           <a:prstGeom prst="rect">
             <a:avLst/>
           </a:prstGeom>
-          <a:solidFill>
-            <a:srgbClr val="FFD700"/>
-          </a:solidFill>
+          <a:solidFill>val="F0B429"/&gt;</a:solidFill>
           <a:ln>
             <a:noFill/>
           </a:ln>
@@ -9486,9 +9788,7 @@
           <a:prstGeom prst="rect">
             <a:avLst/>
           </a:prstGeom>
-          <a:solidFill>
-            <a:srgbClr val="146B4A"/>
-          </a:solidFill>
+          <a:solidFill>val="007A55"/&gt;</a:solidFill>
           <a:ln>
             <a:noFill/>
           </a:ln>
@@ -9530,9 +9830,7 @@
           <a:prstGeom prst="rect">
             <a:avLst/>
           </a:prstGeom>
-          <a:solidFill>
-            <a:srgbClr val="146B4A"/>
-          </a:solidFill>
+          <a:solidFill>val="007A55"/&gt;</a:solidFill>
           <a:ln>
             <a:noFill/>
           </a:ln>
@@ -9585,10 +9883,8 @@
             <a:pPr algn="ctr"/>
             <a:r>
               <a:rPr sz="2200" b="1" i="0">
-                <a:solidFill>
-                  <a:srgbClr val="BBBBBB"/>
-                </a:solidFill>
-                <a:latin typeface="Calibri"/>
+                <a:solidFill>val="9AA7B6"/&gt;</a:solidFill>
+                <a:latin typeface="Poppins"/>
               </a:rPr>
               <a:t>Section 2</a:t>
             </a:r>
@@ -9620,10 +9916,8 @@
             <a:pPr algn="ctr"/>
             <a:r>
               <a:rPr sz="2800" b="1" i="0">
-                <a:solidFill>
-                  <a:srgbClr val="FFD700"/>
-                </a:solidFill>
-                <a:latin typeface="Calibri"/>
+                <a:solidFill>val="F0B429"/&gt;</a:solidFill>
+                <a:latin typeface="Poppins"/>
               </a:rPr>
               <a:t>Creating and Organizing Slides</a:t>
             </a:r>
@@ -9654,6 +9948,47 @@
           </a:prstGeom>
         </p:spPr>
       </p:pic>
+      <p:sp>
+        <p:nvSpPr>
+          <p:cNvPr id="990001" name="Pied de page FLE"/>
+          <p:cNvSpPr>
+            <a:spLocks noGrp="1"/>
+          </p:cNvSpPr>
+          <p:nvPr/>
+        </p:nvSpPr>
+        <p:spPr>
+          <a:xfrm>
+            <a:off x="4343400" y="-329184"/>
+            <a:ext cx="4572000" cy="274320"/>
+          </a:xfrm>
+          <a:prstGeom prst="rect">
+            <a:avLst/>
+          </a:prstGeom>
+        </p:spPr>
+        <p:txBody>
+          <a:bodyPr anchor="b"/>
+          <a:lstStyle/>
+          <a:p>
+            <a:pPr algn="r">
+              <a:defRPr sz="900">
+                <a:solidFill>
+                  <a:srgbClr val="9AA7B6"/>
+                </a:solidFill>
+                <a:latin typeface="Poppins"/>
+              </a:defRPr>
+            </a:pPr>
+            <a:r>
+              <a:rPr lang="fr-FR" sz="900">
+                <a:solidFill>
+                  <a:srgbClr val="9AA7B6"/>
+                </a:solidFill>
+                <a:latin typeface="Poppins"/>
+              </a:rPr>
+              <a:t>Université de Mostaganem — Dr. Madani BELACEL</a:t>
+            </a:r>
+          </a:p>
+        </p:txBody>
+      </p:sp>
     </p:spTree>
   </p:cSld>
   <p:clrMapOvr>
@@ -9667,9 +10002,7 @@
   <p:cSld>
     <p:bg>
       <p:bgPr>
-        <a:solidFill>
-          <a:srgbClr val="0B3D2E"/>
-        </a:solidFill>
+        <a:solidFill>val="004A38"/&gt;</a:solidFill>
         <a:effectLst/>
       </p:bgPr>
     </p:bg>
@@ -9694,9 +10027,7 @@
           <a:prstGeom prst="rect">
             <a:avLst/>
           </a:prstGeom>
-          <a:solidFill>
-            <a:srgbClr val="146B4A"/>
-          </a:solidFill>
+          <a:solidFill>val="007A55"/&gt;</a:solidFill>
           <a:ln>
             <a:noFill/>
           </a:ln>
@@ -9738,9 +10069,7 @@
           <a:prstGeom prst="rect">
             <a:avLst/>
           </a:prstGeom>
-          <a:solidFill>
-            <a:srgbClr val="FFD700"/>
-          </a:solidFill>
+          <a:solidFill>val="F0B429"/&gt;</a:solidFill>
           <a:ln>
             <a:noFill/>
           </a:ln>
@@ -9782,9 +10111,7 @@
           <a:prstGeom prst="rect">
             <a:avLst/>
           </a:prstGeom>
-          <a:solidFill>
-            <a:srgbClr val="FFD700"/>
-          </a:solidFill>
+          <a:solidFill>val="F0B429"/&gt;</a:solidFill>
           <a:ln>
             <a:noFill/>
           </a:ln>
@@ -9826,9 +10153,7 @@
           <a:prstGeom prst="rect">
             <a:avLst/>
           </a:prstGeom>
-          <a:solidFill>
-            <a:srgbClr val="146B4A"/>
-          </a:solidFill>
+          <a:solidFill>val="007A55"/&gt;</a:solidFill>
           <a:ln>
             <a:noFill/>
           </a:ln>
@@ -9881,10 +10206,8 @@
             <a:pPr algn="l"/>
             <a:r>
               <a:rPr sz="2400" b="1" i="0">
-                <a:solidFill>
-                  <a:srgbClr val="FFD700"/>
-                </a:solidFill>
-                <a:latin typeface="Calibri"/>
+                <a:solidFill>val="F0B429"/&gt;</a:solidFill>
+                <a:latin typeface="Poppins"/>
               </a:rPr>
               <a:t>2 - Creating and Organizing Slides</a:t>
             </a:r>
@@ -9905,9 +10228,7 @@
           <a:prstGeom prst="rect">
             <a:avLst/>
           </a:prstGeom>
-          <a:solidFill>
-            <a:srgbClr val="146B4A"/>
-          </a:solidFill>
+          <a:solidFill>val="007A55"/&gt;</a:solidFill>
           <a:ln>
             <a:noFill/>
           </a:ln>
@@ -9964,10 +10285,8 @@
             </a:pPr>
             <a:r>
               <a:rPr sz="1800">
-                <a:solidFill>
-                  <a:srgbClr val="FFFFFF"/>
-                </a:solidFill>
-                <a:latin typeface="Calibri"/>
+                <a:solidFill>val="FFFFFF"/&gt;</a:solidFill>
+                <a:latin typeface="Poppins"/>
               </a:rPr>
               <a:t>▪  New slide: choose a layout (title, content...).</a:t>
             </a:r>
@@ -9980,10 +10299,8 @@
             </a:pPr>
             <a:r>
               <a:rPr sz="1800">
-                <a:solidFill>
-                  <a:srgbClr val="FFFFFF"/>
-                </a:solidFill>
-                <a:latin typeface="Calibri"/>
+                <a:solidFill>val="FFFFFF"/&gt;</a:solidFill>
+                <a:latin typeface="Poppins"/>
               </a:rPr>
               <a:t>▪  Slide master: overall visual consistency.</a:t>
             </a:r>
@@ -9996,10 +10313,8 @@
             </a:pPr>
             <a:r>
               <a:rPr sz="1800">
-                <a:solidFill>
-                  <a:srgbClr val="FFFFFF"/>
-                </a:solidFill>
-                <a:latin typeface="Calibri"/>
+                <a:solidFill>val="FFFFFF"/&gt;</a:solidFill>
+                <a:latin typeface="Poppins"/>
               </a:rPr>
               <a:t>▪  Reorganize: copy, move, duplicate, delete.</a:t>
             </a:r>
@@ -10012,10 +10327,8 @@
             </a:pPr>
             <a:r>
               <a:rPr sz="1800">
-                <a:solidFill>
-                  <a:srgbClr val="FFFFFF"/>
-                </a:solidFill>
-                <a:latin typeface="Calibri"/>
+                <a:solidFill>val="FFFFFF"/&gt;</a:solidFill>
+                <a:latin typeface="Poppins"/>
               </a:rPr>
               <a:t>▪  Sections to structure a long presentation.</a:t>
             </a:r>
@@ -10028,10 +10341,8 @@
             </a:pPr>
             <a:r>
               <a:rPr sz="1800">
-                <a:solidFill>
-                  <a:srgbClr val="FFFFFF"/>
-                </a:solidFill>
-                <a:latin typeface="Calibri"/>
+                <a:solidFill>val="FFFFFF"/&gt;</a:solidFill>
+                <a:latin typeface="Poppins"/>
               </a:rPr>
               <a:t>▪  Themes and color variants.</a:t>
             </a:r>
@@ -10062,6 +10373,47 @@
           </a:prstGeom>
         </p:spPr>
       </p:pic>
+      <p:sp>
+        <p:nvSpPr>
+          <p:cNvPr id="990001" name="Pied de page FLE"/>
+          <p:cNvSpPr>
+            <a:spLocks noGrp="1"/>
+          </p:cNvSpPr>
+          <p:nvPr/>
+        </p:nvSpPr>
+        <p:spPr>
+          <a:xfrm>
+            <a:off x="4343400" y="-329184"/>
+            <a:ext cx="4572000" cy="274320"/>
+          </a:xfrm>
+          <a:prstGeom prst="rect">
+            <a:avLst/>
+          </a:prstGeom>
+        </p:spPr>
+        <p:txBody>
+          <a:bodyPr anchor="b"/>
+          <a:lstStyle/>
+          <a:p>
+            <a:pPr algn="r">
+              <a:defRPr sz="900">
+                <a:solidFill>
+                  <a:srgbClr val="9AA7B6"/>
+                </a:solidFill>
+                <a:latin typeface="Poppins"/>
+              </a:defRPr>
+            </a:pPr>
+            <a:r>
+              <a:rPr lang="fr-FR" sz="900">
+                <a:solidFill>
+                  <a:srgbClr val="9AA7B6"/>
+                </a:solidFill>
+                <a:latin typeface="Poppins"/>
+              </a:rPr>
+              <a:t>Université de Mostaganem — Dr. Madani BELACEL</a:t>
+            </a:r>
+          </a:p>
+        </p:txBody>
+      </p:sp>
     </p:spTree>
   </p:cSld>
   <p:clrMapOvr>
@@ -10075,9 +10427,7 @@
   <p:cSld>
     <p:bg>
       <p:bgPr>
-        <a:solidFill>
-          <a:srgbClr val="0B3D2E"/>
-        </a:solidFill>
+        <a:solidFill>val="004A38"/&gt;</a:solidFill>
         <a:effectLst/>
       </p:bgPr>
     </p:bg>
@@ -10102,9 +10452,7 @@
           <a:prstGeom prst="rect">
             <a:avLst/>
           </a:prstGeom>
-          <a:solidFill>
-            <a:srgbClr val="146B4A"/>
-          </a:solidFill>
+          <a:solidFill>val="007A55"/&gt;</a:solidFill>
           <a:ln>
             <a:noFill/>
           </a:ln>
@@ -10146,9 +10494,7 @@
           <a:prstGeom prst="rect">
             <a:avLst/>
           </a:prstGeom>
-          <a:solidFill>
-            <a:srgbClr val="FFD700"/>
-          </a:solidFill>
+          <a:solidFill>val="F0B429"/&gt;</a:solidFill>
           <a:ln>
             <a:noFill/>
           </a:ln>
@@ -10190,9 +10536,7 @@
           <a:prstGeom prst="rect">
             <a:avLst/>
           </a:prstGeom>
-          <a:solidFill>
-            <a:srgbClr val="FFD700"/>
-          </a:solidFill>
+          <a:solidFill>val="F0B429"/&gt;</a:solidFill>
           <a:ln>
             <a:noFill/>
           </a:ln>
@@ -10234,9 +10578,7 @@
           <a:prstGeom prst="rect">
             <a:avLst/>
           </a:prstGeom>
-          <a:solidFill>
-            <a:srgbClr val="146B4A"/>
-          </a:solidFill>
+          <a:solidFill>val="007A55"/&gt;</a:solidFill>
           <a:ln>
             <a:noFill/>
           </a:ln>
@@ -10278,9 +10620,7 @@
           <a:prstGeom prst="rect">
             <a:avLst/>
           </a:prstGeom>
-          <a:solidFill>
-            <a:srgbClr val="146B4A"/>
-          </a:solidFill>
+          <a:solidFill>val="007A55"/&gt;</a:solidFill>
           <a:ln>
             <a:noFill/>
           </a:ln>
@@ -10333,10 +10673,8 @@
             <a:pPr algn="ctr"/>
             <a:r>
               <a:rPr sz="2200" b="1" i="0">
-                <a:solidFill>
-                  <a:srgbClr val="BBBBBB"/>
-                </a:solidFill>
-                <a:latin typeface="Calibri"/>
+                <a:solidFill>val="9AA7B6"/&gt;</a:solidFill>
+                <a:latin typeface="Poppins"/>
               </a:rPr>
               <a:t>Section 3</a:t>
             </a:r>
@@ -10368,10 +10706,8 @@
             <a:pPr algn="ctr"/>
             <a:r>
               <a:rPr sz="2800" b="1" i="0">
-                <a:solidFill>
-                  <a:srgbClr val="FFD700"/>
-                </a:solidFill>
-                <a:latin typeface="Calibri"/>
+                <a:solidFill>val="F0B429"/&gt;</a:solidFill>
+                <a:latin typeface="Poppins"/>
               </a:rPr>
               <a:t>Text and Multimedia Objects</a:t>
             </a:r>
@@ -10402,6 +10738,47 @@
           </a:prstGeom>
         </p:spPr>
       </p:pic>
+      <p:sp>
+        <p:nvSpPr>
+          <p:cNvPr id="990001" name="Pied de page FLE"/>
+          <p:cNvSpPr>
+            <a:spLocks noGrp="1"/>
+          </p:cNvSpPr>
+          <p:nvPr/>
+        </p:nvSpPr>
+        <p:spPr>
+          <a:xfrm>
+            <a:off x="4343400" y="-329184"/>
+            <a:ext cx="4572000" cy="274320"/>
+          </a:xfrm>
+          <a:prstGeom prst="rect">
+            <a:avLst/>
+          </a:prstGeom>
+        </p:spPr>
+        <p:txBody>
+          <a:bodyPr anchor="b"/>
+          <a:lstStyle/>
+          <a:p>
+            <a:pPr algn="r">
+              <a:defRPr sz="900">
+                <a:solidFill>
+                  <a:srgbClr val="9AA7B6"/>
+                </a:solidFill>
+                <a:latin typeface="Poppins"/>
+              </a:defRPr>
+            </a:pPr>
+            <a:r>
+              <a:rPr lang="fr-FR" sz="900">
+                <a:solidFill>
+                  <a:srgbClr val="9AA7B6"/>
+                </a:solidFill>
+                <a:latin typeface="Poppins"/>
+              </a:rPr>
+              <a:t>Université de Mostaganem — Dr. Madani BELACEL</a:t>
+            </a:r>
+          </a:p>
+        </p:txBody>
+      </p:sp>
     </p:spTree>
   </p:cSld>
   <p:clrMapOvr>
@@ -10415,9 +10792,7 @@
   <p:cSld>
     <p:bg>
       <p:bgPr>
-        <a:solidFill>
-          <a:srgbClr val="0B3D2E"/>
-        </a:solidFill>
+        <a:solidFill>val="004A38"/&gt;</a:solidFill>
         <a:effectLst/>
       </p:bgPr>
     </p:bg>
@@ -10442,9 +10817,7 @@
           <a:prstGeom prst="rect">
             <a:avLst/>
           </a:prstGeom>
-          <a:solidFill>
-            <a:srgbClr val="146B4A"/>
-          </a:solidFill>
+          <a:solidFill>val="007A55"/&gt;</a:solidFill>
           <a:ln>
             <a:noFill/>
           </a:ln>
@@ -10486,9 +10859,7 @@
           <a:prstGeom prst="rect">
             <a:avLst/>
           </a:prstGeom>
-          <a:solidFill>
-            <a:srgbClr val="FFD700"/>
-          </a:solidFill>
+          <a:solidFill>val="F0B429"/&gt;</a:solidFill>
           <a:ln>
             <a:noFill/>
           </a:ln>
@@ -10530,9 +10901,7 @@
           <a:prstGeom prst="rect">
             <a:avLst/>
           </a:prstGeom>
-          <a:solidFill>
-            <a:srgbClr val="FFD700"/>
-          </a:solidFill>
+          <a:solidFill>val="F0B429"/&gt;</a:solidFill>
           <a:ln>
             <a:noFill/>
           </a:ln>
@@ -10574,9 +10943,7 @@
           <a:prstGeom prst="rect">
             <a:avLst/>
           </a:prstGeom>
-          <a:solidFill>
-            <a:srgbClr val="146B4A"/>
-          </a:solidFill>
+          <a:solidFill>val="007A55"/&gt;</a:solidFill>
           <a:ln>
             <a:noFill/>
           </a:ln>
@@ -10629,10 +10996,8 @@
             <a:pPr algn="l"/>
             <a:r>
               <a:rPr sz="2400" b="1" i="0">
-                <a:solidFill>
-                  <a:srgbClr val="FFD700"/>
-                </a:solidFill>
-                <a:latin typeface="Calibri"/>
+                <a:solidFill>val="F0B429"/&gt;</a:solidFill>
+                <a:latin typeface="Poppins"/>
               </a:rPr>
               <a:t>3 - Text and Multimedia Objects</a:t>
             </a:r>
@@ -10653,9 +11018,7 @@
           <a:prstGeom prst="rect">
             <a:avLst/>
           </a:prstGeom>
-          <a:solidFill>
-            <a:srgbClr val="146B4A"/>
-          </a:solidFill>
+          <a:solidFill>val="007A55"/&gt;</a:solidFill>
           <a:ln>
             <a:noFill/>
           </a:ln>
@@ -10712,10 +11075,8 @@
             </a:pPr>
             <a:r>
               <a:rPr sz="1800">
-                <a:solidFill>
-                  <a:srgbClr val="FFFFFF"/>
-                </a:solidFill>
-                <a:latin typeface="Calibri"/>
+                <a:solidFill>val="FFFFFF"/&gt;</a:solidFill>
+                <a:latin typeface="Poppins"/>
               </a:rPr>
               <a:t>▪  Text boxes: concise titles and bullets (6x6 rule).</a:t>
             </a:r>
@@ -10728,10 +11089,8 @@
             </a:pPr>
             <a:r>
               <a:rPr sz="1800">
-                <a:solidFill>
-                  <a:srgbClr val="FFFFFF"/>
-                </a:solidFill>
-                <a:latin typeface="Calibri"/>
+                <a:solidFill>val="FFFFFF"/&gt;</a:solidFill>
+                <a:latin typeface="Poppins"/>
               </a:rPr>
               <a:t>▪  Pictures, icons and screenshots.</a:t>
             </a:r>
@@ -10744,10 +11103,8 @@
             </a:pPr>
             <a:r>
               <a:rPr sz="1800">
-                <a:solidFill>
-                  <a:srgbClr val="FFFFFF"/>
-                </a:solidFill>
-                <a:latin typeface="Calibri"/>
+                <a:solidFill>val="FFFFFF"/&gt;</a:solidFill>
+                <a:latin typeface="Poppins"/>
               </a:rPr>
               <a:t>▪  Embedded or linked video and audio.</a:t>
             </a:r>
@@ -10760,10 +11117,8 @@
             </a:pPr>
             <a:r>
               <a:rPr sz="1800">
-                <a:solidFill>
-                  <a:srgbClr val="FFFFFF"/>
-                </a:solidFill>
-                <a:latin typeface="Calibri"/>
+                <a:solidFill>val="FFFFFF"/&gt;</a:solidFill>
+                <a:latin typeface="Poppins"/>
               </a:rPr>
               <a:t>▪  Tables and SmartArt graphics.</a:t>
             </a:r>
@@ -10776,10 +11131,8 @@
             </a:pPr>
             <a:r>
               <a:rPr sz="1800">
-                <a:solidFill>
-                  <a:srgbClr val="FFFFFF"/>
-                </a:solidFill>
-                <a:latin typeface="Calibri"/>
+                <a:solidFill>val="FFFFFF"/&gt;</a:solidFill>
+                <a:latin typeface="Poppins"/>
               </a:rPr>
               <a:t>▪  Hyperlinks between slides or to the Web.</a:t>
             </a:r>
@@ -10810,6 +11163,47 @@
           </a:prstGeom>
         </p:spPr>
       </p:pic>
+      <p:sp>
+        <p:nvSpPr>
+          <p:cNvPr id="990001" name="Pied de page FLE"/>
+          <p:cNvSpPr>
+            <a:spLocks noGrp="1"/>
+          </p:cNvSpPr>
+          <p:nvPr/>
+        </p:nvSpPr>
+        <p:spPr>
+          <a:xfrm>
+            <a:off x="4343400" y="-329184"/>
+            <a:ext cx="4572000" cy="274320"/>
+          </a:xfrm>
+          <a:prstGeom prst="rect">
+            <a:avLst/>
+          </a:prstGeom>
+        </p:spPr>
+        <p:txBody>
+          <a:bodyPr anchor="b"/>
+          <a:lstStyle/>
+          <a:p>
+            <a:pPr algn="r">
+              <a:defRPr sz="900">
+                <a:solidFill>
+                  <a:srgbClr val="9AA7B6"/>
+                </a:solidFill>
+                <a:latin typeface="Poppins"/>
+              </a:defRPr>
+            </a:pPr>
+            <a:r>
+              <a:rPr lang="fr-FR" sz="900">
+                <a:solidFill>
+                  <a:srgbClr val="9AA7B6"/>
+                </a:solidFill>
+                <a:latin typeface="Poppins"/>
+              </a:rPr>
+              <a:t>Université de Mostaganem — Dr. Madani BELACEL</a:t>
+            </a:r>
+          </a:p>
+        </p:txBody>
+      </p:sp>
     </p:spTree>
   </p:cSld>
   <p:clrMapOvr>
@@ -10823,9 +11217,7 @@
   <p:cSld>
     <p:bg>
       <p:bgPr>
-        <a:solidFill>
-          <a:srgbClr val="0B3D2E"/>
-        </a:solidFill>
+        <a:solidFill>val="004A38"/&gt;</a:solidFill>
         <a:effectLst/>
       </p:bgPr>
     </p:bg>
@@ -10850,9 +11242,7 @@
           <a:prstGeom prst="rect">
             <a:avLst/>
           </a:prstGeom>
-          <a:solidFill>
-            <a:srgbClr val="146B4A"/>
-          </a:solidFill>
+          <a:solidFill>val="007A55"/&gt;</a:solidFill>
           <a:ln>
             <a:noFill/>
           </a:ln>
@@ -10894,9 +11284,7 @@
           <a:prstGeom prst="rect">
             <a:avLst/>
           </a:prstGeom>
-          <a:solidFill>
-            <a:srgbClr val="FFD700"/>
-          </a:solidFill>
+          <a:solidFill>val="F0B429"/&gt;</a:solidFill>
           <a:ln>
             <a:noFill/>
           </a:ln>
@@ -10938,9 +11326,7 @@
           <a:prstGeom prst="rect">
             <a:avLst/>
           </a:prstGeom>
-          <a:solidFill>
-            <a:srgbClr val="FFD700"/>
-          </a:solidFill>
+          <a:solidFill>val="F0B429"/&gt;</a:solidFill>
           <a:ln>
             <a:noFill/>
           </a:ln>
@@ -10982,9 +11368,7 @@
           <a:prstGeom prst="rect">
             <a:avLst/>
           </a:prstGeom>
-          <a:solidFill>
-            <a:srgbClr val="146B4A"/>
-          </a:solidFill>
+          <a:solidFill>val="007A55"/&gt;</a:solidFill>
           <a:ln>
             <a:noFill/>
           </a:ln>
@@ -11026,9 +11410,7 @@
           <a:prstGeom prst="rect">
             <a:avLst/>
           </a:prstGeom>
-          <a:solidFill>
-            <a:srgbClr val="146B4A"/>
-          </a:solidFill>
+          <a:solidFill>val="007A55"/&gt;</a:solidFill>
           <a:ln>
             <a:noFill/>
           </a:ln>
@@ -11081,10 +11463,8 @@
             <a:pPr algn="ctr"/>
             <a:r>
               <a:rPr sz="2200" b="1" i="0">
-                <a:solidFill>
-                  <a:srgbClr val="BBBBBB"/>
-                </a:solidFill>
-                <a:latin typeface="Calibri"/>
+                <a:solidFill>val="9AA7B6"/&gt;</a:solidFill>
+                <a:latin typeface="Poppins"/>
               </a:rPr>
               <a:t>Section 4</a:t>
             </a:r>
@@ -11116,10 +11496,8 @@
             <a:pPr algn="ctr"/>
             <a:r>
               <a:rPr sz="2800" b="1" i="0">
-                <a:solidFill>
-                  <a:srgbClr val="FFD700"/>
-                </a:solidFill>
-                <a:latin typeface="Calibri"/>
+                <a:solidFill>val="F0B429"/&gt;</a:solidFill>
+                <a:latin typeface="Poppins"/>
               </a:rPr>
               <a:t>Animations and Transitions</a:t>
             </a:r>
@@ -11150,6 +11528,47 @@
           </a:prstGeom>
         </p:spPr>
       </p:pic>
+      <p:sp>
+        <p:nvSpPr>
+          <p:cNvPr id="990001" name="Pied de page FLE"/>
+          <p:cNvSpPr>
+            <a:spLocks noGrp="1"/>
+          </p:cNvSpPr>
+          <p:nvPr/>
+        </p:nvSpPr>
+        <p:spPr>
+          <a:xfrm>
+            <a:off x="4343400" y="-329184"/>
+            <a:ext cx="4572000" cy="274320"/>
+          </a:xfrm>
+          <a:prstGeom prst="rect">
+            <a:avLst/>
+          </a:prstGeom>
+        </p:spPr>
+        <p:txBody>
+          <a:bodyPr anchor="b"/>
+          <a:lstStyle/>
+          <a:p>
+            <a:pPr algn="r">
+              <a:defRPr sz="900">
+                <a:solidFill>
+                  <a:srgbClr val="9AA7B6"/>
+                </a:solidFill>
+                <a:latin typeface="Poppins"/>
+              </a:defRPr>
+            </a:pPr>
+            <a:r>
+              <a:rPr lang="fr-FR" sz="900">
+                <a:solidFill>
+                  <a:srgbClr val="9AA7B6"/>
+                </a:solidFill>
+                <a:latin typeface="Poppins"/>
+              </a:rPr>
+              <a:t>Université de Mostaganem — Dr. Madani BELACEL</a:t>
+            </a:r>
+          </a:p>
+        </p:txBody>
+      </p:sp>
     </p:spTree>
   </p:cSld>
   <p:clrMapOvr>
@@ -11201,7 +11620,7 @@
     </a:clrScheme>
     <a:fontScheme name="Office">
       <a:majorFont>
-        <a:latin typeface="Calibri"/>
+        <a:latin typeface="Poppins"/>
         <a:ea typeface=""/>
         <a:cs typeface=""/>
         <a:font script="Jpan" typeface="ＭＳ Ｐゴシック"/>
@@ -11236,7 +11655,7 @@
         <a:font script="Geor" typeface="Sylfaen"/>
       </a:majorFont>
       <a:minorFont>
-        <a:latin typeface="Calibri"/>
+        <a:latin typeface="Poppins"/>
         <a:ea typeface=""/>
         <a:cs typeface=""/>
         <a:font script="Jpan" typeface="ＭＳ Ｐゴシック"/>
